--- a/dist/초2/수학/도형과측정/초2_수학_도형과측정_05_시각과시간_학생용.pptx
+++ b/dist/초2/수학/도형과측정/초2_수학_도형과측정_05_시각과시간_학생용.pptx
@@ -121,13 +121,13 @@
   <p:extLst>
     <p:ext uri="{521415D9-36F7-43E2-AB2F-B90AF26B5E84}">
       <p14:sectionLst xmlns:p14="http://schemas.microsoft.com/office/powerpoint/2010/main">
-        <p14:section name="도입" id="{d512b7be-725a-3bba-2833-4b121040dac2}">
+        <p14:section name="도입" id="{fe21be56-9574-f614-9c2f-912a0dda891a}">
           <p14:sldIdLst>
             <p14:sldId id="256"/>
             <p14:sldId id="257"/>
           </p14:sldIdLst>
         </p14:section>
-        <p14:section name="개념" id="{2f2d41d9-bd2a-7f48-9871-3476db45427d}">
+        <p14:section name="개념" id="{1e9c5a34-aace-4cf2-3901-1936e9027344}">
           <p14:sldIdLst>
             <p14:sldId id="258"/>
             <p14:sldId id="259"/>
@@ -137,31 +137,31 @@
             <p14:sldId id="265"/>
           </p14:sldIdLst>
         </p14:section>
-        <p14:section name="연습" id="{ed5af047-62f9-526b-e492-8ceb2b89ef85}">
+        <p14:section name="연습" id="{d0db4b53-c033-a08c-a1be-323b19a65797}">
           <p14:sldIdLst>
             <p14:sldId id="261"/>
             <p14:sldId id="262"/>
             <p14:sldId id="266"/>
           </p14:sldIdLst>
         </p14:section>
-        <p14:section name="개념" id="{0c36e579-c3e7-fe9b-f6cd-893a1f9ab621}">
+        <p14:section name="개념" id="{36fb3e3c-4e12-b8eb-9d74-0034c2fe25b4}">
           <p14:sldIdLst/>
         </p14:section>
-        <p14:section name="연습" id="{68fd4315-4f11-fe7e-e84e-1d69254d2eea}">
+        <p14:section name="연습" id="{3dbbf358-fb3a-8a5f-a6e1-033a30091e9f}">
           <p14:sldIdLst/>
         </p14:section>
-        <p14:section name="확인" id="{26a64f3b-0e88-4563-eba0-0cd06cdbb6a9}">
+        <p14:section name="확인" id="{1901ede0-1f30-251c-3785-42f3c50eb4c0}">
           <p14:sldIdLst>
             <p14:sldId id="267"/>
             <p14:sldId id="268"/>
           </p14:sldIdLst>
         </p14:section>
-        <p14:section name="정리" id="{4deb8224-6c10-46d4-4a99-c53bee468f41}">
+        <p14:section name="정리" id="{a6c402a3-5bec-52cb-002d-3bac433c3b30}">
           <p14:sldIdLst>
             <p14:sldId id="269"/>
           </p14:sldIdLst>
         </p14:section>
-        <p14:section name="보충" id="{15ecbf1d-8b04-4be7-1020-b8cb3123fe18}">
+        <p14:section name="보충" id="{a83fd308-987c-0837-95c9-b53f6c49fd4a}">
           <p14:sldIdLst>
             <p14:sldId id="270"/>
           </p14:sldIdLst>
@@ -4353,7 +4353,7 @@
         </p:nvSpPr>
         <p:spPr>
           <a:xfrm>
-            <a:off x="9913925" y="982638"/>
+            <a:off x="9950501" y="919286"/>
             <a:ext cx="548640" cy="365760"/>
           </a:xfrm>
           <a:prstGeom prst="rect">
@@ -4392,7 +4392,7 @@
         </p:nvSpPr>
         <p:spPr>
           <a:xfrm>
-            <a:off x="10310202" y="1378915"/>
+            <a:off x="10373554" y="1342339"/>
             <a:ext cx="548640" cy="365760"/>
           </a:xfrm>
           <a:prstGeom prst="rect">
@@ -4431,7 +4431,7 @@
         </p:nvSpPr>
         <p:spPr>
           <a:xfrm>
-            <a:off x="10455250" y="1920240"/>
+            <a:off x="10528402" y="1920240"/>
             <a:ext cx="548640" cy="365760"/>
           </a:xfrm>
           <a:prstGeom prst="rect">
@@ -4470,7 +4470,7 @@
         </p:nvSpPr>
         <p:spPr>
           <a:xfrm>
-            <a:off x="10310202" y="2461565"/>
+            <a:off x="10373554" y="2498141"/>
             <a:ext cx="548640" cy="365760"/>
           </a:xfrm>
           <a:prstGeom prst="rect">
@@ -4509,7 +4509,7 @@
         </p:nvSpPr>
         <p:spPr>
           <a:xfrm>
-            <a:off x="9913925" y="2857842"/>
+            <a:off x="9950501" y="2921194"/>
             <a:ext cx="548640" cy="365760"/>
           </a:xfrm>
           <a:prstGeom prst="rect">
@@ -4548,7 +4548,7 @@
         </p:nvSpPr>
         <p:spPr>
           <a:xfrm>
-            <a:off x="9372600" y="3002890"/>
+            <a:off x="9372600" y="3076042"/>
             <a:ext cx="548640" cy="365760"/>
           </a:xfrm>
           <a:prstGeom prst="rect">
@@ -4587,7 +4587,7 @@
         </p:nvSpPr>
         <p:spPr>
           <a:xfrm>
-            <a:off x="8831275" y="2857842"/>
+            <a:off x="8794699" y="2921194"/>
             <a:ext cx="548640" cy="365760"/>
           </a:xfrm>
           <a:prstGeom prst="rect">
@@ -4626,7 +4626,7 @@
         </p:nvSpPr>
         <p:spPr>
           <a:xfrm>
-            <a:off x="8434998" y="2461565"/>
+            <a:off x="8371646" y="2498141"/>
             <a:ext cx="548640" cy="365760"/>
           </a:xfrm>
           <a:prstGeom prst="rect">
@@ -4665,7 +4665,7 @@
         </p:nvSpPr>
         <p:spPr>
           <a:xfrm>
-            <a:off x="8289950" y="1920240"/>
+            <a:off x="8216798" y="1920240"/>
             <a:ext cx="548640" cy="365760"/>
           </a:xfrm>
           <a:prstGeom prst="rect">
@@ -4704,7 +4704,7 @@
         </p:nvSpPr>
         <p:spPr>
           <a:xfrm>
-            <a:off x="8434998" y="1378915"/>
+            <a:off x="8371646" y="1342339"/>
             <a:ext cx="548640" cy="365760"/>
           </a:xfrm>
           <a:prstGeom prst="rect">
@@ -4743,7 +4743,7 @@
         </p:nvSpPr>
         <p:spPr>
           <a:xfrm>
-            <a:off x="8831275" y="982638"/>
+            <a:off x="8794699" y="919286"/>
             <a:ext cx="548640" cy="365760"/>
           </a:xfrm>
           <a:prstGeom prst="rect">
@@ -4782,7 +4782,7 @@
         </p:nvSpPr>
         <p:spPr>
           <a:xfrm>
-            <a:off x="9372600" y="837590"/>
+            <a:off x="9372600" y="764438"/>
             <a:ext cx="548640" cy="365760"/>
           </a:xfrm>
           <a:prstGeom prst="rect">
@@ -4821,8 +4821,8 @@
         </p:nvSpPr>
         <p:spPr>
           <a:xfrm flipH="1">
-            <a:off x="8983938" y="2103120"/>
-            <a:ext cx="662982" cy="309154"/>
+            <a:off x="9063496" y="2103120"/>
+            <a:ext cx="583424" cy="272055"/>
           </a:xfrm>
           <a:prstGeom prst="line">
             <a:avLst/>
@@ -4844,8 +4844,8 @@
         </p:nvSpPr>
         <p:spPr>
           <a:xfrm flipV="1">
-            <a:off x="9646920" y="1532534"/>
-            <a:ext cx="988283" cy="570586"/>
+            <a:off x="9646920" y="1634947"/>
+            <a:ext cx="810899" cy="468173"/>
           </a:xfrm>
           <a:prstGeom prst="line">
             <a:avLst/>
@@ -8219,7 +8219,7 @@
         </p:nvSpPr>
         <p:spPr>
           <a:xfrm>
-            <a:off x="2495409" y="2293895"/>
+            <a:off x="2527785" y="2237819"/>
             <a:ext cx="548640" cy="365760"/>
           </a:xfrm>
           <a:prstGeom prst="rect">
@@ -8258,7 +8258,7 @@
         </p:nvSpPr>
         <p:spPr>
           <a:xfrm>
-            <a:off x="2846176" y="2644662"/>
+            <a:off x="2902252" y="2612286"/>
             <a:ext cx="548640" cy="365760"/>
           </a:xfrm>
           <a:prstGeom prst="rect">
@@ -8297,7 +8297,7 @@
         </p:nvSpPr>
         <p:spPr>
           <a:xfrm>
-            <a:off x="2974566" y="3123819"/>
+            <a:off x="3039317" y="3123819"/>
             <a:ext cx="548640" cy="365760"/>
           </a:xfrm>
           <a:prstGeom prst="rect">
@@ -8336,7 +8336,7 @@
         </p:nvSpPr>
         <p:spPr>
           <a:xfrm>
-            <a:off x="2846176" y="3602976"/>
+            <a:off x="2902252" y="3635352"/>
             <a:ext cx="548640" cy="365760"/>
           </a:xfrm>
           <a:prstGeom prst="rect">
@@ -8375,7 +8375,7 @@
         </p:nvSpPr>
         <p:spPr>
           <a:xfrm>
-            <a:off x="2495409" y="3953743"/>
+            <a:off x="2527785" y="4009819"/>
             <a:ext cx="548640" cy="365760"/>
           </a:xfrm>
           <a:prstGeom prst="rect">
@@ -8414,7 +8414,7 @@
         </p:nvSpPr>
         <p:spPr>
           <a:xfrm>
-            <a:off x="2016252" y="4082133"/>
+            <a:off x="2016252" y="4146884"/>
             <a:ext cx="548640" cy="365760"/>
           </a:xfrm>
           <a:prstGeom prst="rect">
@@ -8453,7 +8453,7 @@
         </p:nvSpPr>
         <p:spPr>
           <a:xfrm>
-            <a:off x="1537095" y="3953743"/>
+            <a:off x="1504719" y="4009819"/>
             <a:ext cx="548640" cy="365760"/>
           </a:xfrm>
           <a:prstGeom prst="rect">
@@ -8492,7 +8492,7 @@
         </p:nvSpPr>
         <p:spPr>
           <a:xfrm>
-            <a:off x="1186328" y="3602976"/>
+            <a:off x="1130252" y="3635352"/>
             <a:ext cx="548640" cy="365760"/>
           </a:xfrm>
           <a:prstGeom prst="rect">
@@ -8531,7 +8531,7 @@
         </p:nvSpPr>
         <p:spPr>
           <a:xfrm>
-            <a:off x="1057938" y="3123819"/>
+            <a:off x="993187" y="3123819"/>
             <a:ext cx="548640" cy="365760"/>
           </a:xfrm>
           <a:prstGeom prst="rect">
@@ -8570,7 +8570,7 @@
         </p:nvSpPr>
         <p:spPr>
           <a:xfrm>
-            <a:off x="1186328" y="2644662"/>
+            <a:off x="1130252" y="2612286"/>
             <a:ext cx="548640" cy="365760"/>
           </a:xfrm>
           <a:prstGeom prst="rect">
@@ -8609,7 +8609,7 @@
         </p:nvSpPr>
         <p:spPr>
           <a:xfrm>
-            <a:off x="1537095" y="2293895"/>
+            <a:off x="1504719" y="2237819"/>
             <a:ext cx="548640" cy="365760"/>
           </a:xfrm>
           <a:prstGeom prst="rect">
@@ -8648,7 +8648,7 @@
         </p:nvSpPr>
         <p:spPr>
           <a:xfrm>
-            <a:off x="2016252" y="2165505"/>
+            <a:off x="2016252" y="2100754"/>
             <a:ext cx="548640" cy="365760"/>
           </a:xfrm>
           <a:prstGeom prst="rect">
@@ -8688,7 +8688,7 @@
         <p:spPr>
           <a:xfrm>
             <a:off x="2290572" y="3306699"/>
-            <a:ext cx="112439" cy="637672"/>
+            <a:ext cx="98946" cy="561152"/>
           </a:xfrm>
           <a:prstGeom prst="line">
             <a:avLst/>
@@ -8710,8 +8710,8 @@
         </p:nvSpPr>
         <p:spPr>
           <a:xfrm flipH="1">
-            <a:off x="1415787" y="3306699"/>
-            <a:ext cx="874785" cy="505057"/>
+            <a:off x="1572800" y="3306699"/>
+            <a:ext cx="717772" cy="414406"/>
           </a:xfrm>
           <a:prstGeom prst="line">
             <a:avLst/>
@@ -10202,7 +10202,7 @@
         </p:nvSpPr>
         <p:spPr>
           <a:xfrm>
-            <a:off x="6299313" y="2293895"/>
+            <a:off x="6331689" y="2237819"/>
             <a:ext cx="548640" cy="365760"/>
           </a:xfrm>
           <a:prstGeom prst="rect">
@@ -10241,7 +10241,7 @@
         </p:nvSpPr>
         <p:spPr>
           <a:xfrm>
-            <a:off x="6650080" y="2644662"/>
+            <a:off x="6706156" y="2612286"/>
             <a:ext cx="548640" cy="365760"/>
           </a:xfrm>
           <a:prstGeom prst="rect">
@@ -10280,7 +10280,7 @@
         </p:nvSpPr>
         <p:spPr>
           <a:xfrm>
-            <a:off x="6778470" y="3123819"/>
+            <a:off x="6843221" y="3123819"/>
             <a:ext cx="548640" cy="365760"/>
           </a:xfrm>
           <a:prstGeom prst="rect">
@@ -10319,7 +10319,7 @@
         </p:nvSpPr>
         <p:spPr>
           <a:xfrm>
-            <a:off x="6650080" y="3602976"/>
+            <a:off x="6706156" y="3635352"/>
             <a:ext cx="548640" cy="365760"/>
           </a:xfrm>
           <a:prstGeom prst="rect">
@@ -10358,7 +10358,7 @@
         </p:nvSpPr>
         <p:spPr>
           <a:xfrm>
-            <a:off x="6299313" y="3953743"/>
+            <a:off x="6331689" y="4009819"/>
             <a:ext cx="548640" cy="365760"/>
           </a:xfrm>
           <a:prstGeom prst="rect">
@@ -10397,7 +10397,7 @@
         </p:nvSpPr>
         <p:spPr>
           <a:xfrm>
-            <a:off x="5820156" y="4082133"/>
+            <a:off x="5820156" y="4146884"/>
             <a:ext cx="548640" cy="365760"/>
           </a:xfrm>
           <a:prstGeom prst="rect">
@@ -10436,7 +10436,7 @@
         </p:nvSpPr>
         <p:spPr>
           <a:xfrm>
-            <a:off x="5340999" y="3953743"/>
+            <a:off x="5308623" y="4009819"/>
             <a:ext cx="548640" cy="365760"/>
           </a:xfrm>
           <a:prstGeom prst="rect">
@@ -10475,7 +10475,7 @@
         </p:nvSpPr>
         <p:spPr>
           <a:xfrm>
-            <a:off x="4990232" y="3602976"/>
+            <a:off x="4934156" y="3635352"/>
             <a:ext cx="548640" cy="365760"/>
           </a:xfrm>
           <a:prstGeom prst="rect">
@@ -10514,7 +10514,7 @@
         </p:nvSpPr>
         <p:spPr>
           <a:xfrm>
-            <a:off x="4861842" y="3123819"/>
+            <a:off x="4797091" y="3123819"/>
             <a:ext cx="548640" cy="365760"/>
           </a:xfrm>
           <a:prstGeom prst="rect">
@@ -10553,7 +10553,7 @@
         </p:nvSpPr>
         <p:spPr>
           <a:xfrm>
-            <a:off x="4990232" y="2644662"/>
+            <a:off x="4934156" y="2612286"/>
             <a:ext cx="548640" cy="365760"/>
           </a:xfrm>
           <a:prstGeom prst="rect">
@@ -10592,7 +10592,7 @@
         </p:nvSpPr>
         <p:spPr>
           <a:xfrm>
-            <a:off x="5340999" y="2293895"/>
+            <a:off x="5308623" y="2237819"/>
             <a:ext cx="548640" cy="365760"/>
           </a:xfrm>
           <a:prstGeom prst="rect">
@@ -10631,7 +10631,7 @@
         </p:nvSpPr>
         <p:spPr>
           <a:xfrm>
-            <a:off x="5820156" y="2165505"/>
+            <a:off x="5820156" y="2100754"/>
             <a:ext cx="548640" cy="365760"/>
           </a:xfrm>
           <a:prstGeom prst="rect">
@@ -10670,8 +10670,8 @@
         </p:nvSpPr>
         <p:spPr>
           <a:xfrm flipH="1" flipV="1">
-            <a:off x="5573971" y="2921546"/>
-            <a:ext cx="520505" cy="385153"/>
+            <a:off x="5636432" y="2967764"/>
+            <a:ext cx="458044" cy="338935"/>
           </a:xfrm>
           <a:prstGeom prst="line">
             <a:avLst/>
@@ -10693,8 +10693,8 @@
         </p:nvSpPr>
         <p:spPr>
           <a:xfrm flipV="1">
-            <a:off x="6094476" y="3096684"/>
-            <a:ext cx="988041" cy="210015"/>
+            <a:off x="6094476" y="3134379"/>
+            <a:ext cx="810701" cy="172320"/>
           </a:xfrm>
           <a:prstGeom prst="line">
             <a:avLst/>
@@ -12549,7 +12549,7 @@
         </p:nvSpPr>
         <p:spPr>
           <a:xfrm>
-            <a:off x="2445913" y="2964732"/>
+            <a:off x="2475974" y="2912665"/>
             <a:ext cx="548640" cy="365760"/>
           </a:xfrm>
           <a:prstGeom prst="rect">
@@ -12588,7 +12588,7 @@
         </p:nvSpPr>
         <p:spPr>
           <a:xfrm>
-            <a:off x="2771604" y="3290423"/>
+            <a:off x="2823671" y="3260362"/>
             <a:ext cx="548640" cy="365760"/>
           </a:xfrm>
           <a:prstGeom prst="rect">
@@ -12627,7 +12627,7 @@
         </p:nvSpPr>
         <p:spPr>
           <a:xfrm>
-            <a:off x="2890815" y="3735324"/>
+            <a:off x="2950936" y="3735324"/>
             <a:ext cx="548640" cy="365760"/>
           </a:xfrm>
           <a:prstGeom prst="rect">
@@ -12666,7 +12666,7 @@
         </p:nvSpPr>
         <p:spPr>
           <a:xfrm>
-            <a:off x="2771604" y="4180225"/>
+            <a:off x="2823671" y="4210286"/>
             <a:ext cx="548640" cy="365760"/>
           </a:xfrm>
           <a:prstGeom prst="rect">
@@ -12705,7 +12705,7 @@
         </p:nvSpPr>
         <p:spPr>
           <a:xfrm>
-            <a:off x="2445913" y="4505916"/>
+            <a:off x="2475974" y="4557983"/>
             <a:ext cx="548640" cy="365760"/>
           </a:xfrm>
           <a:prstGeom prst="rect">
@@ -12744,7 +12744,7 @@
         </p:nvSpPr>
         <p:spPr>
           <a:xfrm>
-            <a:off x="2001012" y="4625127"/>
+            <a:off x="2001012" y="4685248"/>
             <a:ext cx="548640" cy="365760"/>
           </a:xfrm>
           <a:prstGeom prst="rect">
@@ -12783,7 +12783,7 @@
         </p:nvSpPr>
         <p:spPr>
           <a:xfrm>
-            <a:off x="1556111" y="4505916"/>
+            <a:off x="1526050" y="4557983"/>
             <a:ext cx="548640" cy="365760"/>
           </a:xfrm>
           <a:prstGeom prst="rect">
@@ -12822,7 +12822,7 @@
         </p:nvSpPr>
         <p:spPr>
           <a:xfrm>
-            <a:off x="1230420" y="4180225"/>
+            <a:off x="1178353" y="4210286"/>
             <a:ext cx="548640" cy="365760"/>
           </a:xfrm>
           <a:prstGeom prst="rect">
@@ -12861,7 +12861,7 @@
         </p:nvSpPr>
         <p:spPr>
           <a:xfrm>
-            <a:off x="1111209" y="3735324"/>
+            <a:off x="1051088" y="3735324"/>
             <a:ext cx="548640" cy="365760"/>
           </a:xfrm>
           <a:prstGeom prst="rect">
@@ -12900,7 +12900,7 @@
         </p:nvSpPr>
         <p:spPr>
           <a:xfrm>
-            <a:off x="1230420" y="3290423"/>
+            <a:off x="1178353" y="3260362"/>
             <a:ext cx="548640" cy="365760"/>
           </a:xfrm>
           <a:prstGeom prst="rect">
@@ -12939,7 +12939,7 @@
         </p:nvSpPr>
         <p:spPr>
           <a:xfrm>
-            <a:off x="1556111" y="2964732"/>
+            <a:off x="1526050" y="2912665"/>
             <a:ext cx="548640" cy="365760"/>
           </a:xfrm>
           <a:prstGeom prst="rect">
@@ -12978,7 +12978,7 @@
         </p:nvSpPr>
         <p:spPr>
           <a:xfrm>
-            <a:off x="2001012" y="2845521"/>
+            <a:off x="2001012" y="2785400"/>
             <a:ext cx="548640" cy="365760"/>
           </a:xfrm>
           <a:prstGeom prst="rect">
@@ -13017,8 +13017,8 @@
         </p:nvSpPr>
         <p:spPr>
           <a:xfrm flipV="1">
-            <a:off x="2275332" y="3767671"/>
-            <a:ext cx="582068" cy="150533"/>
+            <a:off x="2275332" y="3785735"/>
+            <a:ext cx="512220" cy="132469"/>
           </a:xfrm>
           <a:prstGeom prst="line">
             <a:avLst/>
@@ -13040,8 +13040,8 @@
         </p:nvSpPr>
         <p:spPr>
           <a:xfrm flipH="1">
-            <a:off x="2177295" y="3918204"/>
-            <a:ext cx="98037" cy="932762"/>
+            <a:off x="2194891" y="3918204"/>
+            <a:ext cx="80441" cy="765343"/>
           </a:xfrm>
           <a:prstGeom prst="line">
             <a:avLst/>
@@ -14540,7 +14540,7 @@
         </p:nvSpPr>
         <p:spPr>
           <a:xfrm>
-            <a:off x="6265057" y="2964732"/>
+            <a:off x="6295118" y="2912665"/>
             <a:ext cx="548640" cy="365760"/>
           </a:xfrm>
           <a:prstGeom prst="rect">
@@ -14579,7 +14579,7 @@
         </p:nvSpPr>
         <p:spPr>
           <a:xfrm>
-            <a:off x="6590748" y="3290423"/>
+            <a:off x="6642815" y="3260362"/>
             <a:ext cx="548640" cy="365760"/>
           </a:xfrm>
           <a:prstGeom prst="rect">
@@ -14618,7 +14618,7 @@
         </p:nvSpPr>
         <p:spPr>
           <a:xfrm>
-            <a:off x="6709959" y="3735324"/>
+            <a:off x="6770080" y="3735324"/>
             <a:ext cx="548640" cy="365760"/>
           </a:xfrm>
           <a:prstGeom prst="rect">
@@ -14657,7 +14657,7 @@
         </p:nvSpPr>
         <p:spPr>
           <a:xfrm>
-            <a:off x="6590748" y="4180225"/>
+            <a:off x="6642815" y="4210286"/>
             <a:ext cx="548640" cy="365760"/>
           </a:xfrm>
           <a:prstGeom prst="rect">
@@ -14696,7 +14696,7 @@
         </p:nvSpPr>
         <p:spPr>
           <a:xfrm>
-            <a:off x="6265057" y="4505916"/>
+            <a:off x="6295118" y="4557983"/>
             <a:ext cx="548640" cy="365760"/>
           </a:xfrm>
           <a:prstGeom prst="rect">
@@ -14735,7 +14735,7 @@
         </p:nvSpPr>
         <p:spPr>
           <a:xfrm>
-            <a:off x="5820156" y="4625127"/>
+            <a:off x="5820156" y="4685248"/>
             <a:ext cx="548640" cy="365760"/>
           </a:xfrm>
           <a:prstGeom prst="rect">
@@ -14774,7 +14774,7 @@
         </p:nvSpPr>
         <p:spPr>
           <a:xfrm>
-            <a:off x="5375255" y="4505916"/>
+            <a:off x="5345194" y="4557983"/>
             <a:ext cx="548640" cy="365760"/>
           </a:xfrm>
           <a:prstGeom prst="rect">
@@ -14813,7 +14813,7 @@
         </p:nvSpPr>
         <p:spPr>
           <a:xfrm>
-            <a:off x="5049564" y="4180225"/>
+            <a:off x="4997497" y="4210286"/>
             <a:ext cx="548640" cy="365760"/>
           </a:xfrm>
           <a:prstGeom prst="rect">
@@ -14852,7 +14852,7 @@
         </p:nvSpPr>
         <p:spPr>
           <a:xfrm>
-            <a:off x="4930353" y="3735324"/>
+            <a:off x="4870232" y="3735324"/>
             <a:ext cx="548640" cy="365760"/>
           </a:xfrm>
           <a:prstGeom prst="rect">
@@ -14891,7 +14891,7 @@
         </p:nvSpPr>
         <p:spPr>
           <a:xfrm>
-            <a:off x="5049564" y="3290423"/>
+            <a:off x="4997497" y="3260362"/>
             <a:ext cx="548640" cy="365760"/>
           </a:xfrm>
           <a:prstGeom prst="rect">
@@ -14930,7 +14930,7 @@
         </p:nvSpPr>
         <p:spPr>
           <a:xfrm>
-            <a:off x="5375255" y="2964732"/>
+            <a:off x="5345194" y="2912665"/>
             <a:ext cx="548640" cy="365760"/>
           </a:xfrm>
           <a:prstGeom prst="rect">
@@ -14969,7 +14969,7 @@
         </p:nvSpPr>
         <p:spPr>
           <a:xfrm>
-            <a:off x="5820156" y="2845521"/>
+            <a:off x="5820156" y="2785400"/>
             <a:ext cx="548640" cy="365760"/>
           </a:xfrm>
           <a:prstGeom prst="rect">
@@ -15009,7 +15009,7 @@
         <p:spPr>
           <a:xfrm>
             <a:off x="6094476" y="3918204"/>
-            <a:ext cx="580732" cy="155607"/>
+            <a:ext cx="511044" cy="136934"/>
           </a:xfrm>
           <a:prstGeom prst="line">
             <a:avLst/>
@@ -15032,7 +15032,7 @@
         <p:spPr>
           <a:xfrm>
             <a:off x="6094476" y="3918204"/>
-            <a:ext cx="0" cy="937900"/>
+            <a:ext cx="0" cy="769559"/>
           </a:xfrm>
           <a:prstGeom prst="line">
             <a:avLst/>
@@ -16531,7 +16531,7 @@
         </p:nvSpPr>
         <p:spPr>
           <a:xfrm>
-            <a:off x="10084201" y="2964732"/>
+            <a:off x="10114262" y="2912665"/>
             <a:ext cx="548640" cy="365760"/>
           </a:xfrm>
           <a:prstGeom prst="rect">
@@ -16570,7 +16570,7 @@
         </p:nvSpPr>
         <p:spPr>
           <a:xfrm>
-            <a:off x="10409892" y="3290423"/>
+            <a:off x="10461959" y="3260362"/>
             <a:ext cx="548640" cy="365760"/>
           </a:xfrm>
           <a:prstGeom prst="rect">
@@ -16609,7 +16609,7 @@
         </p:nvSpPr>
         <p:spPr>
           <a:xfrm>
-            <a:off x="10529103" y="3735324"/>
+            <a:off x="10589224" y="3735324"/>
             <a:ext cx="548640" cy="365760"/>
           </a:xfrm>
           <a:prstGeom prst="rect">
@@ -16648,7 +16648,7 @@
         </p:nvSpPr>
         <p:spPr>
           <a:xfrm>
-            <a:off x="10409892" y="4180225"/>
+            <a:off x="10461959" y="4210286"/>
             <a:ext cx="548640" cy="365760"/>
           </a:xfrm>
           <a:prstGeom prst="rect">
@@ -16687,7 +16687,7 @@
         </p:nvSpPr>
         <p:spPr>
           <a:xfrm>
-            <a:off x="10084201" y="4505916"/>
+            <a:off x="10114262" y="4557983"/>
             <a:ext cx="548640" cy="365760"/>
           </a:xfrm>
           <a:prstGeom prst="rect">
@@ -16726,7 +16726,7 @@
         </p:nvSpPr>
         <p:spPr>
           <a:xfrm>
-            <a:off x="9639300" y="4625127"/>
+            <a:off x="9639300" y="4685248"/>
             <a:ext cx="548640" cy="365760"/>
           </a:xfrm>
           <a:prstGeom prst="rect">
@@ -16765,7 +16765,7 @@
         </p:nvSpPr>
         <p:spPr>
           <a:xfrm>
-            <a:off x="9194399" y="4505916"/>
+            <a:off x="9164338" y="4557983"/>
             <a:ext cx="548640" cy="365760"/>
           </a:xfrm>
           <a:prstGeom prst="rect">
@@ -16804,7 +16804,7 @@
         </p:nvSpPr>
         <p:spPr>
           <a:xfrm>
-            <a:off x="8868708" y="4180225"/>
+            <a:off x="8816641" y="4210286"/>
             <a:ext cx="548640" cy="365760"/>
           </a:xfrm>
           <a:prstGeom prst="rect">
@@ -16843,7 +16843,7 @@
         </p:nvSpPr>
         <p:spPr>
           <a:xfrm>
-            <a:off x="8749497" y="3735324"/>
+            <a:off x="8689376" y="3735324"/>
             <a:ext cx="548640" cy="365760"/>
           </a:xfrm>
           <a:prstGeom prst="rect">
@@ -16882,7 +16882,7 @@
         </p:nvSpPr>
         <p:spPr>
           <a:xfrm>
-            <a:off x="8868708" y="3290423"/>
+            <a:off x="8816641" y="3260362"/>
             <a:ext cx="548640" cy="365760"/>
           </a:xfrm>
           <a:prstGeom prst="rect">
@@ -16921,7 +16921,7 @@
         </p:nvSpPr>
         <p:spPr>
           <a:xfrm>
-            <a:off x="9194399" y="2964732"/>
+            <a:off x="9164338" y="2912665"/>
             <a:ext cx="548640" cy="365760"/>
           </a:xfrm>
           <a:prstGeom prst="rect">
@@ -16960,7 +16960,7 @@
         </p:nvSpPr>
         <p:spPr>
           <a:xfrm>
-            <a:off x="9639300" y="2845521"/>
+            <a:off x="9639300" y="2785400"/>
             <a:ext cx="548640" cy="365760"/>
           </a:xfrm>
           <a:prstGeom prst="rect">
@@ -17000,7 +17000,7 @@
         <p:spPr>
           <a:xfrm>
             <a:off x="9913620" y="3918204"/>
-            <a:ext cx="601218" cy="0"/>
+            <a:ext cx="529072" cy="0"/>
           </a:xfrm>
           <a:prstGeom prst="line">
             <a:avLst/>
@@ -17022,8 +17022,8 @@
         </p:nvSpPr>
         <p:spPr>
           <a:xfrm flipV="1">
-            <a:off x="9913620" y="2980304"/>
-            <a:ext cx="0" cy="937900"/>
+            <a:off x="9913620" y="3148645"/>
+            <a:ext cx="0" cy="769559"/>
           </a:xfrm>
           <a:prstGeom prst="line">
             <a:avLst/>
@@ -19181,7 +19181,7 @@
         </p:nvSpPr>
         <p:spPr>
           <a:xfrm>
-            <a:off x="3542386" y="1784717"/>
+            <a:off x="3581248" y="1717406"/>
             <a:ext cx="548640" cy="365760"/>
           </a:xfrm>
           <a:prstGeom prst="rect">
@@ -19220,7 +19220,7 @@
         </p:nvSpPr>
         <p:spPr>
           <a:xfrm>
-            <a:off x="3963430" y="2205761"/>
+            <a:off x="4030741" y="2166899"/>
             <a:ext cx="548640" cy="365760"/>
           </a:xfrm>
           <a:prstGeom prst="rect">
@@ -19259,7 +19259,7 @@
         </p:nvSpPr>
         <p:spPr>
           <a:xfrm>
-            <a:off x="4117543" y="2780919"/>
+            <a:off x="4195267" y="2780919"/>
             <a:ext cx="548640" cy="365760"/>
           </a:xfrm>
           <a:prstGeom prst="rect">
@@ -19298,7 +19298,7 @@
         </p:nvSpPr>
         <p:spPr>
           <a:xfrm>
-            <a:off x="3963430" y="3356077"/>
+            <a:off x="4030741" y="3394939"/>
             <a:ext cx="548640" cy="365760"/>
           </a:xfrm>
           <a:prstGeom prst="rect">
@@ -19337,7 +19337,7 @@
         </p:nvSpPr>
         <p:spPr>
           <a:xfrm>
-            <a:off x="3542386" y="3777121"/>
+            <a:off x="3581248" y="3844432"/>
             <a:ext cx="548640" cy="365760"/>
           </a:xfrm>
           <a:prstGeom prst="rect">
@@ -19376,7 +19376,7 @@
         </p:nvSpPr>
         <p:spPr>
           <a:xfrm>
-            <a:off x="2967228" y="3931234"/>
+            <a:off x="2967228" y="4008958"/>
             <a:ext cx="548640" cy="365760"/>
           </a:xfrm>
           <a:prstGeom prst="rect">
@@ -19415,7 +19415,7 @@
         </p:nvSpPr>
         <p:spPr>
           <a:xfrm>
-            <a:off x="2392070" y="3777121"/>
+            <a:off x="2353208" y="3844432"/>
             <a:ext cx="548640" cy="365760"/>
           </a:xfrm>
           <a:prstGeom prst="rect">
@@ -19454,7 +19454,7 @@
         </p:nvSpPr>
         <p:spPr>
           <a:xfrm>
-            <a:off x="1971026" y="3356077"/>
+            <a:off x="1903715" y="3394939"/>
             <a:ext cx="548640" cy="365760"/>
           </a:xfrm>
           <a:prstGeom prst="rect">
@@ -19493,7 +19493,7 @@
         </p:nvSpPr>
         <p:spPr>
           <a:xfrm>
-            <a:off x="1816913" y="2780919"/>
+            <a:off x="1739189" y="2780919"/>
             <a:ext cx="548640" cy="365760"/>
           </a:xfrm>
           <a:prstGeom prst="rect">
@@ -19532,7 +19532,7 @@
         </p:nvSpPr>
         <p:spPr>
           <a:xfrm>
-            <a:off x="1971026" y="2205761"/>
+            <a:off x="1903715" y="2166899"/>
             <a:ext cx="548640" cy="365760"/>
           </a:xfrm>
           <a:prstGeom prst="rect">
@@ -19571,7 +19571,7 @@
         </p:nvSpPr>
         <p:spPr>
           <a:xfrm>
-            <a:off x="2392070" y="1784717"/>
+            <a:off x="2353208" y="1717406"/>
             <a:ext cx="548640" cy="365760"/>
           </a:xfrm>
           <a:prstGeom prst="rect">
@@ -19610,7 +19610,7 @@
         </p:nvSpPr>
         <p:spPr>
           <a:xfrm>
-            <a:off x="2967228" y="1630604"/>
+            <a:off x="2967228" y="1552880"/>
             <a:ext cx="548640" cy="365760"/>
           </a:xfrm>
           <a:prstGeom prst="rect">
@@ -19650,7 +19650,7 @@
         <p:spPr>
           <a:xfrm>
             <a:off x="3241548" y="2963799"/>
-            <a:ext cx="777240" cy="0"/>
+            <a:ext cx="683971" cy="0"/>
           </a:xfrm>
           <a:prstGeom prst="line">
             <a:avLst/>
@@ -19672,8 +19672,8 @@
         </p:nvSpPr>
         <p:spPr>
           <a:xfrm flipV="1">
-            <a:off x="3241548" y="1751305"/>
-            <a:ext cx="0" cy="1212494"/>
+            <a:off x="3241548" y="1968932"/>
+            <a:ext cx="0" cy="994867"/>
           </a:xfrm>
           <a:prstGeom prst="line">
             <a:avLst/>
@@ -21164,7 +21164,7 @@
         </p:nvSpPr>
         <p:spPr>
           <a:xfrm>
-            <a:off x="9248242" y="1784717"/>
+            <a:off x="9287104" y="1717406"/>
             <a:ext cx="548640" cy="365760"/>
           </a:xfrm>
           <a:prstGeom prst="rect">
@@ -21203,7 +21203,7 @@
         </p:nvSpPr>
         <p:spPr>
           <a:xfrm>
-            <a:off x="9669286" y="2205761"/>
+            <a:off x="9736597" y="2166899"/>
             <a:ext cx="548640" cy="365760"/>
           </a:xfrm>
           <a:prstGeom prst="rect">
@@ -21242,7 +21242,7 @@
         </p:nvSpPr>
         <p:spPr>
           <a:xfrm>
-            <a:off x="9823399" y="2780919"/>
+            <a:off x="9901123" y="2780919"/>
             <a:ext cx="548640" cy="365760"/>
           </a:xfrm>
           <a:prstGeom prst="rect">
@@ -21281,7 +21281,7 @@
         </p:nvSpPr>
         <p:spPr>
           <a:xfrm>
-            <a:off x="9669286" y="3356077"/>
+            <a:off x="9736597" y="3394939"/>
             <a:ext cx="548640" cy="365760"/>
           </a:xfrm>
           <a:prstGeom prst="rect">
@@ -21320,7 +21320,7 @@
         </p:nvSpPr>
         <p:spPr>
           <a:xfrm>
-            <a:off x="9248242" y="3777121"/>
+            <a:off x="9287104" y="3844432"/>
             <a:ext cx="548640" cy="365760"/>
           </a:xfrm>
           <a:prstGeom prst="rect">
@@ -21359,7 +21359,7 @@
         </p:nvSpPr>
         <p:spPr>
           <a:xfrm>
-            <a:off x="8673084" y="3931234"/>
+            <a:off x="8673084" y="4008958"/>
             <a:ext cx="548640" cy="365760"/>
           </a:xfrm>
           <a:prstGeom prst="rect">
@@ -21398,7 +21398,7 @@
         </p:nvSpPr>
         <p:spPr>
           <a:xfrm>
-            <a:off x="8097926" y="3777121"/>
+            <a:off x="8059064" y="3844432"/>
             <a:ext cx="548640" cy="365760"/>
           </a:xfrm>
           <a:prstGeom prst="rect">
@@ -21437,7 +21437,7 @@
         </p:nvSpPr>
         <p:spPr>
           <a:xfrm>
-            <a:off x="7676882" y="3356077"/>
+            <a:off x="7609571" y="3394939"/>
             <a:ext cx="548640" cy="365760"/>
           </a:xfrm>
           <a:prstGeom prst="rect">
@@ -21476,7 +21476,7 @@
         </p:nvSpPr>
         <p:spPr>
           <a:xfrm>
-            <a:off x="7522769" y="2780919"/>
+            <a:off x="7445045" y="2780919"/>
             <a:ext cx="548640" cy="365760"/>
           </a:xfrm>
           <a:prstGeom prst="rect">
@@ -21515,7 +21515,7 @@
         </p:nvSpPr>
         <p:spPr>
           <a:xfrm>
-            <a:off x="7676882" y="2205761"/>
+            <a:off x="7609571" y="2166899"/>
             <a:ext cx="548640" cy="365760"/>
           </a:xfrm>
           <a:prstGeom prst="rect">
@@ -21554,7 +21554,7 @@
         </p:nvSpPr>
         <p:spPr>
           <a:xfrm>
-            <a:off x="8097926" y="1784717"/>
+            <a:off x="8059064" y="1717406"/>
             <a:ext cx="548640" cy="365760"/>
           </a:xfrm>
           <a:prstGeom prst="rect">
@@ -21593,7 +21593,7 @@
         </p:nvSpPr>
         <p:spPr>
           <a:xfrm>
-            <a:off x="8673084" y="1630604"/>
+            <a:off x="8673084" y="1552880"/>
             <a:ext cx="548640" cy="365760"/>
           </a:xfrm>
           <a:prstGeom prst="rect">
@@ -21633,7 +21633,7 @@
         <p:spPr>
           <a:xfrm>
             <a:off x="8947404" y="2963799"/>
-            <a:ext cx="750756" cy="201165"/>
+            <a:ext cx="660665" cy="177025"/>
           </a:xfrm>
           <a:prstGeom prst="line">
             <a:avLst/>
@@ -21656,7 +21656,7 @@
         <p:spPr>
           <a:xfrm>
             <a:off x="8947404" y="2963799"/>
-            <a:ext cx="0" cy="1212494"/>
+            <a:ext cx="0" cy="994867"/>
           </a:xfrm>
           <a:prstGeom prst="line">
             <a:avLst/>
@@ -21856,7 +21856,7 @@
         </p:nvSpPr>
         <p:spPr>
           <a:xfrm>
-            <a:off x="548640" y="1773936"/>
+            <a:off x="548640" y="2219706"/>
             <a:ext cx="566928" cy="566928"/>
           </a:xfrm>
           <a:prstGeom prst="roundRect">
@@ -21903,8 +21903,8 @@
         </p:nvSpPr>
         <p:spPr>
           <a:xfrm>
-            <a:off x="2715768" y="1325880"/>
-            <a:ext cx="1463040" cy="1463040"/>
+            <a:off x="2450592" y="1325880"/>
+            <a:ext cx="2354580" cy="2354580"/>
           </a:xfrm>
           <a:prstGeom prst="ellipse">
             <a:avLst/>
@@ -21928,8 +21928,8 @@
         </p:nvSpPr>
         <p:spPr>
           <a:xfrm>
-            <a:off x="3447288" y="1362456"/>
-            <a:ext cx="0" cy="80467"/>
+            <a:off x="3627882" y="1362456"/>
+            <a:ext cx="0" cy="129502"/>
           </a:xfrm>
           <a:prstGeom prst="line">
             <a:avLst/>
@@ -21951,8 +21951,8 @@
         </p:nvSpPr>
         <p:spPr>
           <a:xfrm flipH="1">
-            <a:off x="3516106" y="1366263"/>
-            <a:ext cx="3823" cy="36376"/>
+            <a:off x="3740966" y="1368705"/>
+            <a:ext cx="6153" cy="58542"/>
           </a:xfrm>
           <a:prstGeom prst="line">
             <a:avLst/>
@@ -21974,8 +21974,8 @@
         </p:nvSpPr>
         <p:spPr>
           <a:xfrm flipH="1">
-            <a:off x="3584170" y="1377642"/>
-            <a:ext cx="7605" cy="35777"/>
+            <a:off x="3852811" y="1387383"/>
+            <a:ext cx="12239" cy="57578"/>
           </a:xfrm>
           <a:prstGeom prst="line">
             <a:avLst/>
@@ -21997,8 +21997,8 @@
         </p:nvSpPr>
         <p:spPr>
           <a:xfrm flipH="1">
-            <a:off x="3650735" y="1396469"/>
-            <a:ext cx="11303" cy="34786"/>
+            <a:off x="3962192" y="1418287"/>
+            <a:ext cx="18190" cy="55983"/>
           </a:xfrm>
           <a:prstGeom prst="line">
             <a:avLst/>
@@ -22020,8 +22020,8 @@
         </p:nvSpPr>
         <p:spPr>
           <a:xfrm flipH="1">
-            <a:off x="3715070" y="1422537"/>
-            <a:ext cx="14877" cy="33414"/>
+            <a:off x="4067910" y="1461076"/>
+            <a:ext cx="23942" cy="53775"/>
           </a:xfrm>
           <a:prstGeom prst="line">
             <a:avLst/>
@@ -22043,8 +22043,8 @@
         </p:nvSpPr>
         <p:spPr>
           <a:xfrm flipH="1">
-            <a:off x="3754526" y="1455561"/>
-            <a:ext cx="40234" cy="69687"/>
+            <a:off x="4133488" y="1515283"/>
+            <a:ext cx="64751" cy="112152"/>
           </a:xfrm>
           <a:prstGeom prst="line">
             <a:avLst/>
@@ -22066,8 +22066,8 @@
         </p:nvSpPr>
         <p:spPr>
           <a:xfrm flipH="1">
-            <a:off x="3834267" y="1495178"/>
-            <a:ext cx="21499" cy="29591"/>
+            <a:off x="4263777" y="1580313"/>
+            <a:ext cx="34600" cy="47622"/>
           </a:xfrm>
           <a:prstGeom prst="line">
             <a:avLst/>
@@ -22089,8 +22089,8 @@
         </p:nvSpPr>
         <p:spPr>
           <a:xfrm flipH="1">
-            <a:off x="3887822" y="1540956"/>
-            <a:ext cx="24474" cy="27181"/>
+            <a:off x="4351781" y="1655454"/>
+            <a:ext cx="39388" cy="43745"/>
           </a:xfrm>
           <a:prstGeom prst="line">
             <a:avLst/>
@@ -22112,8 +22112,8 @@
         </p:nvSpPr>
         <p:spPr>
           <a:xfrm flipH="1">
-            <a:off x="3936551" y="1592392"/>
-            <a:ext cx="27181" cy="24474"/>
+            <a:off x="4431853" y="1739883"/>
+            <a:ext cx="43745" cy="39388"/>
           </a:xfrm>
           <a:prstGeom prst="line">
             <a:avLst/>
@@ -22135,8 +22135,8 @@
         </p:nvSpPr>
         <p:spPr>
           <a:xfrm flipH="1">
-            <a:off x="3979919" y="1648922"/>
-            <a:ext cx="29591" cy="21499"/>
+            <a:off x="4503117" y="1832675"/>
+            <a:ext cx="47622" cy="34600"/>
           </a:xfrm>
           <a:prstGeom prst="line">
             <a:avLst/>
@@ -22158,8 +22158,8 @@
         </p:nvSpPr>
         <p:spPr>
           <a:xfrm flipH="1">
-            <a:off x="3979441" y="1709928"/>
-            <a:ext cx="69687" cy="40234"/>
+            <a:off x="4503617" y="1932813"/>
+            <a:ext cx="112152" cy="64751"/>
           </a:xfrm>
           <a:prstGeom prst="line">
             <a:avLst/>
@@ -22181,8 +22181,8 @@
         </p:nvSpPr>
         <p:spPr>
           <a:xfrm flipH="1">
-            <a:off x="4048737" y="1774741"/>
-            <a:ext cx="33414" cy="14877"/>
+            <a:off x="4616201" y="2039200"/>
+            <a:ext cx="53775" cy="23942"/>
           </a:xfrm>
           <a:prstGeom prst="line">
             <a:avLst/>
@@ -22204,8 +22204,8 @@
         </p:nvSpPr>
         <p:spPr>
           <a:xfrm flipH="1">
-            <a:off x="4073433" y="1842650"/>
-            <a:ext cx="34786" cy="11303"/>
+            <a:off x="4656782" y="2150670"/>
+            <a:ext cx="55983" cy="18190"/>
           </a:xfrm>
           <a:prstGeom prst="line">
             <a:avLst/>
@@ -22227,8 +22227,8 @@
         </p:nvSpPr>
         <p:spPr>
           <a:xfrm flipH="1">
-            <a:off x="4091269" y="1912913"/>
-            <a:ext cx="35777" cy="7605"/>
+            <a:off x="4686090" y="2266002"/>
+            <a:ext cx="57578" cy="12239"/>
           </a:xfrm>
           <a:prstGeom prst="line">
             <a:avLst/>
@@ -22250,8 +22250,8 @@
         </p:nvSpPr>
         <p:spPr>
           <a:xfrm flipH="1">
-            <a:off x="4102049" y="1984759"/>
-            <a:ext cx="36376" cy="3823"/>
+            <a:off x="4703805" y="2383933"/>
+            <a:ext cx="58542" cy="6153"/>
           </a:xfrm>
           <a:prstGeom prst="line">
             <a:avLst/>
@@ -22273,8 +22273,8 @@
         </p:nvSpPr>
         <p:spPr>
           <a:xfrm flipH="1">
-            <a:off x="4061765" y="2057400"/>
-            <a:ext cx="80467" cy="0"/>
+            <a:off x="4639094" y="2503170"/>
+            <a:ext cx="129502" cy="0"/>
           </a:xfrm>
           <a:prstGeom prst="line">
             <a:avLst/>
@@ -22296,8 +22296,8 @@
         </p:nvSpPr>
         <p:spPr>
           <a:xfrm flipH="1" flipV="1">
-            <a:off x="4102049" y="2126218"/>
-            <a:ext cx="36376" cy="3823"/>
+            <a:off x="4703805" y="2616254"/>
+            <a:ext cx="58542" cy="6153"/>
           </a:xfrm>
           <a:prstGeom prst="line">
             <a:avLst/>
@@ -22319,8 +22319,8 @@
         </p:nvSpPr>
         <p:spPr>
           <a:xfrm flipH="1" flipV="1">
-            <a:off x="4091269" y="2194282"/>
-            <a:ext cx="35777" cy="7605"/>
+            <a:off x="4686090" y="2728099"/>
+            <a:ext cx="57578" cy="12239"/>
           </a:xfrm>
           <a:prstGeom prst="line">
             <a:avLst/>
@@ -22342,8 +22342,8 @@
         </p:nvSpPr>
         <p:spPr>
           <a:xfrm flipH="1" flipV="1">
-            <a:off x="4073433" y="2260847"/>
-            <a:ext cx="34786" cy="11303"/>
+            <a:off x="4656782" y="2837480"/>
+            <a:ext cx="55983" cy="18190"/>
           </a:xfrm>
           <a:prstGeom prst="line">
             <a:avLst/>
@@ -22365,8 +22365,8 @@
         </p:nvSpPr>
         <p:spPr>
           <a:xfrm flipH="1" flipV="1">
-            <a:off x="4048737" y="2325182"/>
-            <a:ext cx="33414" cy="14877"/>
+            <a:off x="4616201" y="2943198"/>
+            <a:ext cx="53775" cy="23942"/>
           </a:xfrm>
           <a:prstGeom prst="line">
             <a:avLst/>
@@ -22388,8 +22388,8 @@
         </p:nvSpPr>
         <p:spPr>
           <a:xfrm flipH="1" flipV="1">
-            <a:off x="3979441" y="2364638"/>
-            <a:ext cx="69687" cy="40234"/>
+            <a:off x="4503617" y="3008776"/>
+            <a:ext cx="112152" cy="64751"/>
           </a:xfrm>
           <a:prstGeom prst="line">
             <a:avLst/>
@@ -22411,8 +22411,8 @@
         </p:nvSpPr>
         <p:spPr>
           <a:xfrm flipH="1" flipV="1">
-            <a:off x="3979919" y="2444379"/>
-            <a:ext cx="29591" cy="21499"/>
+            <a:off x="4503117" y="3139065"/>
+            <a:ext cx="47622" cy="34600"/>
           </a:xfrm>
           <a:prstGeom prst="line">
             <a:avLst/>
@@ -22434,8 +22434,8 @@
         </p:nvSpPr>
         <p:spPr>
           <a:xfrm flipH="1" flipV="1">
-            <a:off x="3936551" y="2497934"/>
-            <a:ext cx="27181" cy="24474"/>
+            <a:off x="4431853" y="3227069"/>
+            <a:ext cx="43745" cy="39388"/>
           </a:xfrm>
           <a:prstGeom prst="line">
             <a:avLst/>
@@ -22457,8 +22457,8 @@
         </p:nvSpPr>
         <p:spPr>
           <a:xfrm flipH="1" flipV="1">
-            <a:off x="3887822" y="2546663"/>
-            <a:ext cx="24474" cy="27181"/>
+            <a:off x="4351781" y="3307141"/>
+            <a:ext cx="39388" cy="43745"/>
           </a:xfrm>
           <a:prstGeom prst="line">
             <a:avLst/>
@@ -22480,8 +22480,8 @@
         </p:nvSpPr>
         <p:spPr>
           <a:xfrm flipH="1" flipV="1">
-            <a:off x="3834267" y="2590031"/>
-            <a:ext cx="21499" cy="29591"/>
+            <a:off x="4263777" y="3378405"/>
+            <a:ext cx="34600" cy="47622"/>
           </a:xfrm>
           <a:prstGeom prst="line">
             <a:avLst/>
@@ -22503,8 +22503,8 @@
         </p:nvSpPr>
         <p:spPr>
           <a:xfrm flipH="1" flipV="1">
-            <a:off x="3754526" y="2589553"/>
-            <a:ext cx="40234" cy="69687"/>
+            <a:off x="4133488" y="3378905"/>
+            <a:ext cx="64751" cy="112152"/>
           </a:xfrm>
           <a:prstGeom prst="line">
             <a:avLst/>
@@ -22526,8 +22526,8 @@
         </p:nvSpPr>
         <p:spPr>
           <a:xfrm flipH="1" flipV="1">
-            <a:off x="3715070" y="2658849"/>
-            <a:ext cx="14877" cy="33414"/>
+            <a:off x="4067910" y="3491489"/>
+            <a:ext cx="23942" cy="53775"/>
           </a:xfrm>
           <a:prstGeom prst="line">
             <a:avLst/>
@@ -22549,8 +22549,8 @@
         </p:nvSpPr>
         <p:spPr>
           <a:xfrm flipH="1" flipV="1">
-            <a:off x="3650735" y="2683545"/>
-            <a:ext cx="11303" cy="34786"/>
+            <a:off x="3962192" y="3532070"/>
+            <a:ext cx="18190" cy="55983"/>
           </a:xfrm>
           <a:prstGeom prst="line">
             <a:avLst/>
@@ -22572,8 +22572,8 @@
         </p:nvSpPr>
         <p:spPr>
           <a:xfrm flipH="1" flipV="1">
-            <a:off x="3584170" y="2701381"/>
-            <a:ext cx="7605" cy="35777"/>
+            <a:off x="3852811" y="3561378"/>
+            <a:ext cx="12239" cy="57578"/>
           </a:xfrm>
           <a:prstGeom prst="line">
             <a:avLst/>
@@ -22595,8 +22595,8 @@
         </p:nvSpPr>
         <p:spPr>
           <a:xfrm flipH="1" flipV="1">
-            <a:off x="3516106" y="2712161"/>
-            <a:ext cx="3823" cy="36376"/>
+            <a:off x="3740966" y="3579093"/>
+            <a:ext cx="6153" cy="58542"/>
           </a:xfrm>
           <a:prstGeom prst="line">
             <a:avLst/>
@@ -22618,8 +22618,8 @@
         </p:nvSpPr>
         <p:spPr>
           <a:xfrm flipV="1">
-            <a:off x="3447288" y="2671877"/>
-            <a:ext cx="0" cy="80467"/>
+            <a:off x="3627882" y="3514382"/>
+            <a:ext cx="0" cy="129502"/>
           </a:xfrm>
           <a:prstGeom prst="line">
             <a:avLst/>
@@ -22641,8 +22641,8 @@
         </p:nvSpPr>
         <p:spPr>
           <a:xfrm flipV="1">
-            <a:off x="3374647" y="2712161"/>
-            <a:ext cx="3823" cy="36376"/>
+            <a:off x="3508645" y="3579093"/>
+            <a:ext cx="6153" cy="58542"/>
           </a:xfrm>
           <a:prstGeom prst="line">
             <a:avLst/>
@@ -22664,8 +22664,8 @@
         </p:nvSpPr>
         <p:spPr>
           <a:xfrm flipV="1">
-            <a:off x="3302801" y="2701381"/>
-            <a:ext cx="7605" cy="35777"/>
+            <a:off x="3390714" y="3561378"/>
+            <a:ext cx="12239" cy="57578"/>
           </a:xfrm>
           <a:prstGeom prst="line">
             <a:avLst/>
@@ -22687,8 +22687,8 @@
         </p:nvSpPr>
         <p:spPr>
           <a:xfrm flipV="1">
-            <a:off x="3232538" y="2683545"/>
-            <a:ext cx="11303" cy="34786"/>
+            <a:off x="3275382" y="3532070"/>
+            <a:ext cx="18190" cy="55983"/>
           </a:xfrm>
           <a:prstGeom prst="line">
             <a:avLst/>
@@ -22710,8 +22710,8 @@
         </p:nvSpPr>
         <p:spPr>
           <a:xfrm flipV="1">
-            <a:off x="3164629" y="2658849"/>
-            <a:ext cx="14877" cy="33414"/>
+            <a:off x="3163912" y="3491489"/>
+            <a:ext cx="23942" cy="53775"/>
           </a:xfrm>
           <a:prstGeom prst="line">
             <a:avLst/>
@@ -22733,8 +22733,8 @@
         </p:nvSpPr>
         <p:spPr>
           <a:xfrm flipV="1">
-            <a:off x="3099816" y="2589553"/>
-            <a:ext cx="40234" cy="69687"/>
+            <a:off x="3057525" y="3378905"/>
+            <a:ext cx="64751" cy="112152"/>
           </a:xfrm>
           <a:prstGeom prst="line">
             <a:avLst/>
@@ -22756,8 +22756,8 @@
         </p:nvSpPr>
         <p:spPr>
           <a:xfrm flipV="1">
-            <a:off x="3038810" y="2590031"/>
-            <a:ext cx="21499" cy="29591"/>
+            <a:off x="2957387" y="3378405"/>
+            <a:ext cx="34600" cy="47622"/>
           </a:xfrm>
           <a:prstGeom prst="line">
             <a:avLst/>
@@ -22779,8 +22779,8 @@
         </p:nvSpPr>
         <p:spPr>
           <a:xfrm flipV="1">
-            <a:off x="2982280" y="2546663"/>
-            <a:ext cx="24474" cy="27181"/>
+            <a:off x="2864595" y="3307141"/>
+            <a:ext cx="39388" cy="43745"/>
           </a:xfrm>
           <a:prstGeom prst="line">
             <a:avLst/>
@@ -22802,8 +22802,8 @@
         </p:nvSpPr>
         <p:spPr>
           <a:xfrm flipV="1">
-            <a:off x="2930844" y="2497934"/>
-            <a:ext cx="27181" cy="24474"/>
+            <a:off x="2780166" y="3227069"/>
+            <a:ext cx="43745" cy="39388"/>
           </a:xfrm>
           <a:prstGeom prst="line">
             <a:avLst/>
@@ -22825,8 +22825,8 @@
         </p:nvSpPr>
         <p:spPr>
           <a:xfrm flipV="1">
-            <a:off x="2885066" y="2444379"/>
-            <a:ext cx="29591" cy="21499"/>
+            <a:off x="2705025" y="3139065"/>
+            <a:ext cx="47622" cy="34600"/>
           </a:xfrm>
           <a:prstGeom prst="line">
             <a:avLst/>
@@ -22848,8 +22848,8 @@
         </p:nvSpPr>
         <p:spPr>
           <a:xfrm flipV="1">
-            <a:off x="2845449" y="2364638"/>
-            <a:ext cx="69687" cy="40234"/>
+            <a:off x="2639995" y="3008776"/>
+            <a:ext cx="112152" cy="64751"/>
           </a:xfrm>
           <a:prstGeom prst="line">
             <a:avLst/>
@@ -22871,8 +22871,8 @@
         </p:nvSpPr>
         <p:spPr>
           <a:xfrm flipV="1">
-            <a:off x="2812425" y="2325182"/>
-            <a:ext cx="33414" cy="14877"/>
+            <a:off x="2585788" y="2943198"/>
+            <a:ext cx="53775" cy="23942"/>
           </a:xfrm>
           <a:prstGeom prst="line">
             <a:avLst/>
@@ -22894,8 +22894,8 @@
         </p:nvSpPr>
         <p:spPr>
           <a:xfrm flipV="1">
-            <a:off x="2786357" y="2260847"/>
-            <a:ext cx="34786" cy="11303"/>
+            <a:off x="2542999" y="2837480"/>
+            <a:ext cx="55983" cy="18190"/>
           </a:xfrm>
           <a:prstGeom prst="line">
             <a:avLst/>
@@ -22917,8 +22917,8 @@
         </p:nvSpPr>
         <p:spPr>
           <a:xfrm flipV="1">
-            <a:off x="2767530" y="2194282"/>
-            <a:ext cx="35777" cy="7605"/>
+            <a:off x="2512095" y="2728099"/>
+            <a:ext cx="57578" cy="12239"/>
           </a:xfrm>
           <a:prstGeom prst="line">
             <a:avLst/>
@@ -22940,8 +22940,8 @@
         </p:nvSpPr>
         <p:spPr>
           <a:xfrm flipV="1">
-            <a:off x="2756151" y="2126218"/>
-            <a:ext cx="36376" cy="3823"/>
+            <a:off x="2493417" y="2616254"/>
+            <a:ext cx="58542" cy="6153"/>
           </a:xfrm>
           <a:prstGeom prst="line">
             <a:avLst/>
@@ -22962,9 +22962,9 @@
           <p:nvPr/>
         </p:nvSpPr>
         <p:spPr>
-          <a:xfrm>
-            <a:off x="2752344" y="2057400"/>
-            <a:ext cx="80467" cy="0"/>
+          <a:xfrm flipV="1">
+            <a:off x="2487168" y="2503170"/>
+            <a:ext cx="129502" cy="0"/>
           </a:xfrm>
           <a:prstGeom prst="line">
             <a:avLst/>
@@ -22986,8 +22986,8 @@
         </p:nvSpPr>
         <p:spPr>
           <a:xfrm>
-            <a:off x="2756151" y="1984759"/>
-            <a:ext cx="36376" cy="3823"/>
+            <a:off x="2493417" y="2383933"/>
+            <a:ext cx="58542" cy="6153"/>
           </a:xfrm>
           <a:prstGeom prst="line">
             <a:avLst/>
@@ -23009,8 +23009,8 @@
         </p:nvSpPr>
         <p:spPr>
           <a:xfrm>
-            <a:off x="2767530" y="1912913"/>
-            <a:ext cx="35777" cy="7605"/>
+            <a:off x="2512095" y="2266002"/>
+            <a:ext cx="57578" cy="12239"/>
           </a:xfrm>
           <a:prstGeom prst="line">
             <a:avLst/>
@@ -23032,8 +23032,8 @@
         </p:nvSpPr>
         <p:spPr>
           <a:xfrm>
-            <a:off x="2786357" y="1842650"/>
-            <a:ext cx="34786" cy="11303"/>
+            <a:off x="2542999" y="2150670"/>
+            <a:ext cx="55983" cy="18190"/>
           </a:xfrm>
           <a:prstGeom prst="line">
             <a:avLst/>
@@ -23055,8 +23055,8 @@
         </p:nvSpPr>
         <p:spPr>
           <a:xfrm>
-            <a:off x="2812425" y="1774741"/>
-            <a:ext cx="33414" cy="14877"/>
+            <a:off x="2585788" y="2039200"/>
+            <a:ext cx="53775" cy="23942"/>
           </a:xfrm>
           <a:prstGeom prst="line">
             <a:avLst/>
@@ -23078,8 +23078,8 @@
         </p:nvSpPr>
         <p:spPr>
           <a:xfrm>
-            <a:off x="2845449" y="1709928"/>
-            <a:ext cx="69687" cy="40234"/>
+            <a:off x="2639995" y="1932813"/>
+            <a:ext cx="112152" cy="64751"/>
           </a:xfrm>
           <a:prstGeom prst="line">
             <a:avLst/>
@@ -23101,8 +23101,8 @@
         </p:nvSpPr>
         <p:spPr>
           <a:xfrm>
-            <a:off x="2885066" y="1648922"/>
-            <a:ext cx="29591" cy="21499"/>
+            <a:off x="2705025" y="1832675"/>
+            <a:ext cx="47622" cy="34600"/>
           </a:xfrm>
           <a:prstGeom prst="line">
             <a:avLst/>
@@ -23124,8 +23124,8 @@
         </p:nvSpPr>
         <p:spPr>
           <a:xfrm>
-            <a:off x="2930844" y="1592392"/>
-            <a:ext cx="27181" cy="24474"/>
+            <a:off x="2780166" y="1739883"/>
+            <a:ext cx="43745" cy="39388"/>
           </a:xfrm>
           <a:prstGeom prst="line">
             <a:avLst/>
@@ -23147,8 +23147,8 @@
         </p:nvSpPr>
         <p:spPr>
           <a:xfrm>
-            <a:off x="2982280" y="1540956"/>
-            <a:ext cx="24474" cy="27181"/>
+            <a:off x="2864595" y="1655454"/>
+            <a:ext cx="39388" cy="43745"/>
           </a:xfrm>
           <a:prstGeom prst="line">
             <a:avLst/>
@@ -23170,8 +23170,8 @@
         </p:nvSpPr>
         <p:spPr>
           <a:xfrm>
-            <a:off x="3038810" y="1495178"/>
-            <a:ext cx="21499" cy="29591"/>
+            <a:off x="2957387" y="1580313"/>
+            <a:ext cx="34600" cy="47622"/>
           </a:xfrm>
           <a:prstGeom prst="line">
             <a:avLst/>
@@ -23193,8 +23193,8 @@
         </p:nvSpPr>
         <p:spPr>
           <a:xfrm>
-            <a:off x="3099816" y="1455561"/>
-            <a:ext cx="40234" cy="69687"/>
+            <a:off x="3057525" y="1515283"/>
+            <a:ext cx="64751" cy="112152"/>
           </a:xfrm>
           <a:prstGeom prst="line">
             <a:avLst/>
@@ -23216,8 +23216,8 @@
         </p:nvSpPr>
         <p:spPr>
           <a:xfrm>
-            <a:off x="3164629" y="1422537"/>
-            <a:ext cx="14877" cy="33414"/>
+            <a:off x="3163912" y="1461076"/>
+            <a:ext cx="23942" cy="53775"/>
           </a:xfrm>
           <a:prstGeom prst="line">
             <a:avLst/>
@@ -23239,8 +23239,8 @@
         </p:nvSpPr>
         <p:spPr>
           <a:xfrm>
-            <a:off x="3232538" y="1396469"/>
-            <a:ext cx="11303" cy="34786"/>
+            <a:off x="3275382" y="1418287"/>
+            <a:ext cx="18190" cy="55983"/>
           </a:xfrm>
           <a:prstGeom prst="line">
             <a:avLst/>
@@ -23262,8 +23262,8 @@
         </p:nvSpPr>
         <p:spPr>
           <a:xfrm>
-            <a:off x="3302801" y="1377642"/>
-            <a:ext cx="7605" cy="35777"/>
+            <a:off x="3390714" y="1387383"/>
+            <a:ext cx="12239" cy="57578"/>
           </a:xfrm>
           <a:prstGeom prst="line">
             <a:avLst/>
@@ -23285,8 +23285,8 @@
         </p:nvSpPr>
         <p:spPr>
           <a:xfrm>
-            <a:off x="3374647" y="1366263"/>
-            <a:ext cx="3823" cy="36376"/>
+            <a:off x="3508645" y="1368705"/>
+            <a:ext cx="6153" cy="58542"/>
           </a:xfrm>
           <a:prstGeom prst="line">
             <a:avLst/>
@@ -23308,7 +23308,7 @@
         </p:nvSpPr>
         <p:spPr>
           <a:xfrm>
-            <a:off x="3443630" y="1405719"/>
+            <a:off x="3818592" y="1514835"/>
             <a:ext cx="548640" cy="365760"/>
           </a:xfrm>
           <a:prstGeom prst="rect">
@@ -23325,7 +23325,7 @@
               <a:buNone/>
             </a:pPr>
             <a:r>
-              <a:rPr lang="ko-KR" altLang="en-US" sz="1200" b="1" dirty="0">
+              <a:rPr lang="ko-KR" altLang="en-US" sz="1900" b="1" dirty="0">
                 <a:solidFill>
                   <a:srgbClr val="1F2937"/>
                 </a:solidFill>
@@ -23335,7 +23335,7 @@
               </a:rPr>
               <a:t>1</a:t>
             </a:r>
-            <a:endParaRPr lang="ko-KR" sz="1200" dirty="0"/>
+            <a:endParaRPr lang="ko-KR" sz="1900" dirty="0"/>
           </a:p>
         </p:txBody>
       </p:sp>
@@ -23347,7 +23347,7 @@
         </p:nvSpPr>
         <p:spPr>
           <a:xfrm>
-            <a:off x="3641769" y="1603858"/>
+            <a:off x="4159017" y="1855260"/>
             <a:ext cx="548640" cy="365760"/>
           </a:xfrm>
           <a:prstGeom prst="rect">
@@ -23364,7 +23364,7 @@
               <a:buNone/>
             </a:pPr>
             <a:r>
-              <a:rPr lang="ko-KR" altLang="en-US" sz="1200" b="1" dirty="0">
+              <a:rPr lang="ko-KR" altLang="en-US" sz="1900" b="1" dirty="0">
                 <a:solidFill>
                   <a:srgbClr val="1F2937"/>
                 </a:solidFill>
@@ -23374,7 +23374,7 @@
               </a:rPr>
               <a:t>2</a:t>
             </a:r>
-            <a:endParaRPr lang="ko-KR" sz="1200" dirty="0"/>
+            <a:endParaRPr lang="ko-KR" sz="1900" dirty="0"/>
           </a:p>
         </p:txBody>
       </p:sp>
@@ -23386,7 +23386,7 @@
         </p:nvSpPr>
         <p:spPr>
           <a:xfrm>
-            <a:off x="3714293" y="1874520"/>
+            <a:off x="4283621" y="2320290"/>
             <a:ext cx="548640" cy="365760"/>
           </a:xfrm>
           <a:prstGeom prst="rect">
@@ -23403,7 +23403,7 @@
               <a:buNone/>
             </a:pPr>
             <a:r>
-              <a:rPr lang="ko-KR" altLang="en-US" sz="1200" b="1" dirty="0">
+              <a:rPr lang="ko-KR" altLang="en-US" sz="1900" b="1" dirty="0">
                 <a:solidFill>
                   <a:srgbClr val="1F2937"/>
                 </a:solidFill>
@@ -23413,7 +23413,7 @@
               </a:rPr>
               <a:t>3</a:t>
             </a:r>
-            <a:endParaRPr lang="ko-KR" sz="1200" dirty="0"/>
+            <a:endParaRPr lang="ko-KR" sz="1900" dirty="0"/>
           </a:p>
         </p:txBody>
       </p:sp>
@@ -23425,7 +23425,7 @@
         </p:nvSpPr>
         <p:spPr>
           <a:xfrm>
-            <a:off x="3641769" y="2145182"/>
+            <a:off x="4159017" y="2785320"/>
             <a:ext cx="548640" cy="365760"/>
           </a:xfrm>
           <a:prstGeom prst="rect">
@@ -23442,7 +23442,7 @@
               <a:buNone/>
             </a:pPr>
             <a:r>
-              <a:rPr lang="ko-KR" altLang="en-US" sz="1200" b="1" dirty="0">
+              <a:rPr lang="ko-KR" altLang="en-US" sz="1900" b="1" dirty="0">
                 <a:solidFill>
                   <a:srgbClr val="1F2937"/>
                 </a:solidFill>
@@ -23452,7 +23452,7 @@
               </a:rPr>
               <a:t>4</a:t>
             </a:r>
-            <a:endParaRPr lang="ko-KR" sz="1200" dirty="0"/>
+            <a:endParaRPr lang="ko-KR" sz="1900" dirty="0"/>
           </a:p>
         </p:txBody>
       </p:sp>
@@ -23464,7 +23464,7 @@
         </p:nvSpPr>
         <p:spPr>
           <a:xfrm>
-            <a:off x="3443630" y="2343321"/>
+            <a:off x="3818592" y="3125745"/>
             <a:ext cx="548640" cy="365760"/>
           </a:xfrm>
           <a:prstGeom prst="rect">
@@ -23481,7 +23481,7 @@
               <a:buNone/>
             </a:pPr>
             <a:r>
-              <a:rPr lang="ko-KR" altLang="en-US" sz="1200" b="1" dirty="0">
+              <a:rPr lang="ko-KR" altLang="en-US" sz="1900" b="1" dirty="0">
                 <a:solidFill>
                   <a:srgbClr val="1F2937"/>
                 </a:solidFill>
@@ -23491,7 +23491,7 @@
               </a:rPr>
               <a:t>5</a:t>
             </a:r>
-            <a:endParaRPr lang="ko-KR" sz="1200" dirty="0"/>
+            <a:endParaRPr lang="ko-KR" sz="1900" dirty="0"/>
           </a:p>
         </p:txBody>
       </p:sp>
@@ -23503,7 +23503,7 @@
         </p:nvSpPr>
         <p:spPr>
           <a:xfrm>
-            <a:off x="3172968" y="2415845"/>
+            <a:off x="3353562" y="3250349"/>
             <a:ext cx="548640" cy="365760"/>
           </a:xfrm>
           <a:prstGeom prst="rect">
@@ -23520,7 +23520,7 @@
               <a:buNone/>
             </a:pPr>
             <a:r>
-              <a:rPr lang="ko-KR" altLang="en-US" sz="1200" b="1" dirty="0">
+              <a:rPr lang="ko-KR" altLang="en-US" sz="1900" b="1" dirty="0">
                 <a:solidFill>
                   <a:srgbClr val="1F2937"/>
                 </a:solidFill>
@@ -23530,7 +23530,7 @@
               </a:rPr>
               <a:t>6</a:t>
             </a:r>
-            <a:endParaRPr lang="ko-KR" sz="1200" dirty="0"/>
+            <a:endParaRPr lang="ko-KR" sz="1900" dirty="0"/>
           </a:p>
         </p:txBody>
       </p:sp>
@@ -23542,7 +23542,7 @@
         </p:nvSpPr>
         <p:spPr>
           <a:xfrm>
-            <a:off x="2902306" y="2343321"/>
+            <a:off x="2888532" y="3125745"/>
             <a:ext cx="548640" cy="365760"/>
           </a:xfrm>
           <a:prstGeom prst="rect">
@@ -23559,7 +23559,7 @@
               <a:buNone/>
             </a:pPr>
             <a:r>
-              <a:rPr lang="ko-KR" altLang="en-US" sz="1200" b="1" dirty="0">
+              <a:rPr lang="ko-KR" altLang="en-US" sz="1900" b="1" dirty="0">
                 <a:solidFill>
                   <a:srgbClr val="1F2937"/>
                 </a:solidFill>
@@ -23569,7 +23569,7 @@
               </a:rPr>
               <a:t>7</a:t>
             </a:r>
-            <a:endParaRPr lang="ko-KR" sz="1200" dirty="0"/>
+            <a:endParaRPr lang="ko-KR" sz="1900" dirty="0"/>
           </a:p>
         </p:txBody>
       </p:sp>
@@ -23581,7 +23581,7 @@
         </p:nvSpPr>
         <p:spPr>
           <a:xfrm>
-            <a:off x="2704167" y="2145182"/>
+            <a:off x="2548107" y="2785320"/>
             <a:ext cx="548640" cy="365760"/>
           </a:xfrm>
           <a:prstGeom prst="rect">
@@ -23598,7 +23598,7 @@
               <a:buNone/>
             </a:pPr>
             <a:r>
-              <a:rPr lang="ko-KR" altLang="en-US" sz="1200" b="1" dirty="0">
+              <a:rPr lang="ko-KR" altLang="en-US" sz="1900" b="1" dirty="0">
                 <a:solidFill>
                   <a:srgbClr val="1F2937"/>
                 </a:solidFill>
@@ -23608,7 +23608,7 @@
               </a:rPr>
               <a:t>8</a:t>
             </a:r>
-            <a:endParaRPr lang="ko-KR" sz="1200" dirty="0"/>
+            <a:endParaRPr lang="ko-KR" sz="1900" dirty="0"/>
           </a:p>
         </p:txBody>
       </p:sp>
@@ -23620,7 +23620,7 @@
         </p:nvSpPr>
         <p:spPr>
           <a:xfrm>
-            <a:off x="2631643" y="1874520"/>
+            <a:off x="2423503" y="2320290"/>
             <a:ext cx="548640" cy="365760"/>
           </a:xfrm>
           <a:prstGeom prst="rect">
@@ -23637,7 +23637,7 @@
               <a:buNone/>
             </a:pPr>
             <a:r>
-              <a:rPr lang="ko-KR" altLang="en-US" sz="1200" b="1" dirty="0">
+              <a:rPr lang="ko-KR" altLang="en-US" sz="1900" b="1" dirty="0">
                 <a:solidFill>
                   <a:srgbClr val="1F2937"/>
                 </a:solidFill>
@@ -23647,7 +23647,7 @@
               </a:rPr>
               <a:t>9</a:t>
             </a:r>
-            <a:endParaRPr lang="ko-KR" sz="1200" dirty="0"/>
+            <a:endParaRPr lang="ko-KR" sz="1900" dirty="0"/>
           </a:p>
         </p:txBody>
       </p:sp>
@@ -23659,7 +23659,7 @@
         </p:nvSpPr>
         <p:spPr>
           <a:xfrm>
-            <a:off x="2704167" y="1603858"/>
+            <a:off x="2548107" y="1855260"/>
             <a:ext cx="548640" cy="365760"/>
           </a:xfrm>
           <a:prstGeom prst="rect">
@@ -23676,7 +23676,7 @@
               <a:buNone/>
             </a:pPr>
             <a:r>
-              <a:rPr lang="ko-KR" altLang="en-US" sz="1200" b="1" dirty="0">
+              <a:rPr lang="ko-KR" altLang="en-US" sz="1900" b="1" dirty="0">
                 <a:solidFill>
                   <a:srgbClr val="1F2937"/>
                 </a:solidFill>
@@ -23686,7 +23686,7 @@
               </a:rPr>
               <a:t>10</a:t>
             </a:r>
-            <a:endParaRPr lang="ko-KR" sz="1200" dirty="0"/>
+            <a:endParaRPr lang="ko-KR" sz="1900" dirty="0"/>
           </a:p>
         </p:txBody>
       </p:sp>
@@ -23698,7 +23698,7 @@
         </p:nvSpPr>
         <p:spPr>
           <a:xfrm>
-            <a:off x="2902306" y="1405719"/>
+            <a:off x="2888532" y="1514835"/>
             <a:ext cx="548640" cy="365760"/>
           </a:xfrm>
           <a:prstGeom prst="rect">
@@ -23715,7 +23715,7 @@
               <a:buNone/>
             </a:pPr>
             <a:r>
-              <a:rPr lang="ko-KR" altLang="en-US" sz="1200" b="1" dirty="0">
+              <a:rPr lang="ko-KR" altLang="en-US" sz="1900" b="1" dirty="0">
                 <a:solidFill>
                   <a:srgbClr val="1F2937"/>
                 </a:solidFill>
@@ -23725,7 +23725,7 @@
               </a:rPr>
               <a:t>11</a:t>
             </a:r>
-            <a:endParaRPr lang="ko-KR" sz="1200" dirty="0"/>
+            <a:endParaRPr lang="ko-KR" sz="1900" dirty="0"/>
           </a:p>
         </p:txBody>
       </p:sp>
@@ -23737,7 +23737,7 @@
         </p:nvSpPr>
         <p:spPr>
           <a:xfrm>
-            <a:off x="3172968" y="1333195"/>
+            <a:off x="3353562" y="1390231"/>
             <a:ext cx="548640" cy="365760"/>
           </a:xfrm>
           <a:prstGeom prst="rect">
@@ -23754,7 +23754,7 @@
               <a:buNone/>
             </a:pPr>
             <a:r>
-              <a:rPr lang="ko-KR" altLang="en-US" sz="1200" b="1" dirty="0">
+              <a:rPr lang="ko-KR" altLang="en-US" sz="1900" b="1" dirty="0">
                 <a:solidFill>
                   <a:srgbClr val="1F2937"/>
                 </a:solidFill>
@@ -23764,7 +23764,7 @@
               </a:rPr>
               <a:t>12</a:t>
             </a:r>
-            <a:endParaRPr lang="ko-KR" sz="1200" dirty="0"/>
+            <a:endParaRPr lang="ko-KR" sz="1900" dirty="0"/>
           </a:p>
         </p:txBody>
       </p:sp>
@@ -23776,8 +23776,8 @@
         </p:nvSpPr>
         <p:spPr>
           <a:xfrm>
-            <a:off x="3447288" y="2057400"/>
-            <a:ext cx="365760" cy="0"/>
+            <a:off x="3627882" y="2503170"/>
+            <a:ext cx="518008" cy="0"/>
           </a:xfrm>
           <a:prstGeom prst="line">
             <a:avLst/>
@@ -23799,8 +23799,8 @@
         </p:nvSpPr>
         <p:spPr>
           <a:xfrm flipV="1">
-            <a:off x="3447288" y="1486814"/>
-            <a:ext cx="0" cy="570586"/>
+            <a:off x="3627882" y="1749704"/>
+            <a:ext cx="0" cy="753466"/>
           </a:xfrm>
           <a:prstGeom prst="line">
             <a:avLst/>
@@ -23822,7 +23822,7 @@
         </p:nvSpPr>
         <p:spPr>
           <a:xfrm>
-            <a:off x="3392424" y="2002536"/>
+            <a:off x="3573018" y="2448306"/>
             <a:ext cx="109728" cy="109728"/>
           </a:xfrm>
           <a:prstGeom prst="ellipse">
@@ -23847,7 +23847,7 @@
         </p:nvSpPr>
         <p:spPr>
           <a:xfrm>
-            <a:off x="6277356" y="1773936"/>
+            <a:off x="6277356" y="2219706"/>
             <a:ext cx="566928" cy="566928"/>
           </a:xfrm>
           <a:prstGeom prst="roundRect">
@@ -23894,8 +23894,8 @@
         </p:nvSpPr>
         <p:spPr>
           <a:xfrm>
-            <a:off x="8444484" y="1325880"/>
-            <a:ext cx="1463040" cy="1463040"/>
+            <a:off x="8179308" y="1325880"/>
+            <a:ext cx="2354580" cy="2354580"/>
           </a:xfrm>
           <a:prstGeom prst="ellipse">
             <a:avLst/>
@@ -23919,8 +23919,8 @@
         </p:nvSpPr>
         <p:spPr>
           <a:xfrm>
-            <a:off x="9176004" y="1362456"/>
-            <a:ext cx="0" cy="80467"/>
+            <a:off x="9356598" y="1362456"/>
+            <a:ext cx="0" cy="129502"/>
           </a:xfrm>
           <a:prstGeom prst="line">
             <a:avLst/>
@@ -23942,8 +23942,8 @@
         </p:nvSpPr>
         <p:spPr>
           <a:xfrm flipH="1">
-            <a:off x="9244822" y="1366263"/>
-            <a:ext cx="3823" cy="36376"/>
+            <a:off x="9469682" y="1368705"/>
+            <a:ext cx="6153" cy="58542"/>
           </a:xfrm>
           <a:prstGeom prst="line">
             <a:avLst/>
@@ -23965,8 +23965,8 @@
         </p:nvSpPr>
         <p:spPr>
           <a:xfrm flipH="1">
-            <a:off x="9312886" y="1377642"/>
-            <a:ext cx="7605" cy="35777"/>
+            <a:off x="9581527" y="1387383"/>
+            <a:ext cx="12239" cy="57578"/>
           </a:xfrm>
           <a:prstGeom prst="line">
             <a:avLst/>
@@ -23988,8 +23988,8 @@
         </p:nvSpPr>
         <p:spPr>
           <a:xfrm flipH="1">
-            <a:off x="9379451" y="1396469"/>
-            <a:ext cx="11303" cy="34786"/>
+            <a:off x="9690908" y="1418287"/>
+            <a:ext cx="18190" cy="55983"/>
           </a:xfrm>
           <a:prstGeom prst="line">
             <a:avLst/>
@@ -24011,8 +24011,8 @@
         </p:nvSpPr>
         <p:spPr>
           <a:xfrm flipH="1">
-            <a:off x="9443786" y="1422537"/>
-            <a:ext cx="14877" cy="33414"/>
+            <a:off x="9796626" y="1461076"/>
+            <a:ext cx="23942" cy="53775"/>
           </a:xfrm>
           <a:prstGeom prst="line">
             <a:avLst/>
@@ -24034,8 +24034,8 @@
         </p:nvSpPr>
         <p:spPr>
           <a:xfrm flipH="1">
-            <a:off x="9483242" y="1455561"/>
-            <a:ext cx="40234" cy="69687"/>
+            <a:off x="9862204" y="1515283"/>
+            <a:ext cx="64751" cy="112152"/>
           </a:xfrm>
           <a:prstGeom prst="line">
             <a:avLst/>
@@ -24057,8 +24057,8 @@
         </p:nvSpPr>
         <p:spPr>
           <a:xfrm flipH="1">
-            <a:off x="9562983" y="1495178"/>
-            <a:ext cx="21499" cy="29591"/>
+            <a:off x="9992493" y="1580313"/>
+            <a:ext cx="34600" cy="47622"/>
           </a:xfrm>
           <a:prstGeom prst="line">
             <a:avLst/>
@@ -24080,8 +24080,8 @@
         </p:nvSpPr>
         <p:spPr>
           <a:xfrm flipH="1">
-            <a:off x="9616538" y="1540956"/>
-            <a:ext cx="24474" cy="27181"/>
+            <a:off x="10080497" y="1655454"/>
+            <a:ext cx="39388" cy="43745"/>
           </a:xfrm>
           <a:prstGeom prst="line">
             <a:avLst/>
@@ -24103,8 +24103,8 @@
         </p:nvSpPr>
         <p:spPr>
           <a:xfrm flipH="1">
-            <a:off x="9665267" y="1592392"/>
-            <a:ext cx="27181" cy="24474"/>
+            <a:off x="10160569" y="1739883"/>
+            <a:ext cx="43745" cy="39388"/>
           </a:xfrm>
           <a:prstGeom prst="line">
             <a:avLst/>
@@ -24126,8 +24126,8 @@
         </p:nvSpPr>
         <p:spPr>
           <a:xfrm flipH="1">
-            <a:off x="9708635" y="1648922"/>
-            <a:ext cx="29591" cy="21499"/>
+            <a:off x="10231833" y="1832675"/>
+            <a:ext cx="47622" cy="34600"/>
           </a:xfrm>
           <a:prstGeom prst="line">
             <a:avLst/>
@@ -24149,8 +24149,8 @@
         </p:nvSpPr>
         <p:spPr>
           <a:xfrm flipH="1">
-            <a:off x="9708157" y="1709928"/>
-            <a:ext cx="69687" cy="40234"/>
+            <a:off x="10232333" y="1932813"/>
+            <a:ext cx="112152" cy="64751"/>
           </a:xfrm>
           <a:prstGeom prst="line">
             <a:avLst/>
@@ -24172,8 +24172,8 @@
         </p:nvSpPr>
         <p:spPr>
           <a:xfrm flipH="1">
-            <a:off x="9777453" y="1774741"/>
-            <a:ext cx="33414" cy="14877"/>
+            <a:off x="10344917" y="2039200"/>
+            <a:ext cx="53775" cy="23942"/>
           </a:xfrm>
           <a:prstGeom prst="line">
             <a:avLst/>
@@ -24195,8 +24195,8 @@
         </p:nvSpPr>
         <p:spPr>
           <a:xfrm flipH="1">
-            <a:off x="9802149" y="1842650"/>
-            <a:ext cx="34786" cy="11303"/>
+            <a:off x="10385498" y="2150670"/>
+            <a:ext cx="55983" cy="18190"/>
           </a:xfrm>
           <a:prstGeom prst="line">
             <a:avLst/>
@@ -24218,8 +24218,8 @@
         </p:nvSpPr>
         <p:spPr>
           <a:xfrm flipH="1">
-            <a:off x="9819985" y="1912913"/>
-            <a:ext cx="35777" cy="7605"/>
+            <a:off x="10414806" y="2266002"/>
+            <a:ext cx="57578" cy="12239"/>
           </a:xfrm>
           <a:prstGeom prst="line">
             <a:avLst/>
@@ -24241,8 +24241,8 @@
         </p:nvSpPr>
         <p:spPr>
           <a:xfrm flipH="1">
-            <a:off x="9830765" y="1984759"/>
-            <a:ext cx="36376" cy="3823"/>
+            <a:off x="10432521" y="2383933"/>
+            <a:ext cx="58542" cy="6153"/>
           </a:xfrm>
           <a:prstGeom prst="line">
             <a:avLst/>
@@ -24264,8 +24264,8 @@
         </p:nvSpPr>
         <p:spPr>
           <a:xfrm flipH="1">
-            <a:off x="9790481" y="2057400"/>
-            <a:ext cx="80467" cy="0"/>
+            <a:off x="10367810" y="2503170"/>
+            <a:ext cx="129502" cy="0"/>
           </a:xfrm>
           <a:prstGeom prst="line">
             <a:avLst/>
@@ -24287,8 +24287,8 @@
         </p:nvSpPr>
         <p:spPr>
           <a:xfrm flipH="1" flipV="1">
-            <a:off x="9830765" y="2126218"/>
-            <a:ext cx="36376" cy="3823"/>
+            <a:off x="10432521" y="2616254"/>
+            <a:ext cx="58542" cy="6153"/>
           </a:xfrm>
           <a:prstGeom prst="line">
             <a:avLst/>
@@ -24310,8 +24310,8 @@
         </p:nvSpPr>
         <p:spPr>
           <a:xfrm flipH="1" flipV="1">
-            <a:off x="9819985" y="2194282"/>
-            <a:ext cx="35777" cy="7605"/>
+            <a:off x="10414806" y="2728099"/>
+            <a:ext cx="57578" cy="12239"/>
           </a:xfrm>
           <a:prstGeom prst="line">
             <a:avLst/>
@@ -24333,8 +24333,8 @@
         </p:nvSpPr>
         <p:spPr>
           <a:xfrm flipH="1" flipV="1">
-            <a:off x="9802149" y="2260847"/>
-            <a:ext cx="34786" cy="11303"/>
+            <a:off x="10385498" y="2837480"/>
+            <a:ext cx="55983" cy="18190"/>
           </a:xfrm>
           <a:prstGeom prst="line">
             <a:avLst/>
@@ -24356,8 +24356,8 @@
         </p:nvSpPr>
         <p:spPr>
           <a:xfrm flipH="1" flipV="1">
-            <a:off x="9777453" y="2325182"/>
-            <a:ext cx="33414" cy="14877"/>
+            <a:off x="10344917" y="2943198"/>
+            <a:ext cx="53775" cy="23942"/>
           </a:xfrm>
           <a:prstGeom prst="line">
             <a:avLst/>
@@ -24379,8 +24379,8 @@
         </p:nvSpPr>
         <p:spPr>
           <a:xfrm flipH="1" flipV="1">
-            <a:off x="9708157" y="2364638"/>
-            <a:ext cx="69687" cy="40234"/>
+            <a:off x="10232333" y="3008776"/>
+            <a:ext cx="112152" cy="64751"/>
           </a:xfrm>
           <a:prstGeom prst="line">
             <a:avLst/>
@@ -24402,8 +24402,8 @@
         </p:nvSpPr>
         <p:spPr>
           <a:xfrm flipH="1" flipV="1">
-            <a:off x="9708635" y="2444379"/>
-            <a:ext cx="29591" cy="21499"/>
+            <a:off x="10231833" y="3139065"/>
+            <a:ext cx="47622" cy="34600"/>
           </a:xfrm>
           <a:prstGeom prst="line">
             <a:avLst/>
@@ -24425,8 +24425,8 @@
         </p:nvSpPr>
         <p:spPr>
           <a:xfrm flipH="1" flipV="1">
-            <a:off x="9665267" y="2497934"/>
-            <a:ext cx="27181" cy="24474"/>
+            <a:off x="10160569" y="3227069"/>
+            <a:ext cx="43745" cy="39388"/>
           </a:xfrm>
           <a:prstGeom prst="line">
             <a:avLst/>
@@ -24448,8 +24448,8 @@
         </p:nvSpPr>
         <p:spPr>
           <a:xfrm flipH="1" flipV="1">
-            <a:off x="9616538" y="2546663"/>
-            <a:ext cx="24474" cy="27181"/>
+            <a:off x="10080497" y="3307141"/>
+            <a:ext cx="39388" cy="43745"/>
           </a:xfrm>
           <a:prstGeom prst="line">
             <a:avLst/>
@@ -24471,8 +24471,8 @@
         </p:nvSpPr>
         <p:spPr>
           <a:xfrm flipH="1" flipV="1">
-            <a:off x="9562983" y="2590031"/>
-            <a:ext cx="21499" cy="29591"/>
+            <a:off x="9992493" y="3378405"/>
+            <a:ext cx="34600" cy="47622"/>
           </a:xfrm>
           <a:prstGeom prst="line">
             <a:avLst/>
@@ -24494,8 +24494,8 @@
         </p:nvSpPr>
         <p:spPr>
           <a:xfrm flipH="1" flipV="1">
-            <a:off x="9483242" y="2589553"/>
-            <a:ext cx="40234" cy="69687"/>
+            <a:off x="9862204" y="3378905"/>
+            <a:ext cx="64751" cy="112152"/>
           </a:xfrm>
           <a:prstGeom prst="line">
             <a:avLst/>
@@ -24517,8 +24517,8 @@
         </p:nvSpPr>
         <p:spPr>
           <a:xfrm flipH="1" flipV="1">
-            <a:off x="9443786" y="2658849"/>
-            <a:ext cx="14877" cy="33414"/>
+            <a:off x="9796626" y="3491489"/>
+            <a:ext cx="23942" cy="53775"/>
           </a:xfrm>
           <a:prstGeom prst="line">
             <a:avLst/>
@@ -24540,8 +24540,8 @@
         </p:nvSpPr>
         <p:spPr>
           <a:xfrm flipH="1" flipV="1">
-            <a:off x="9379451" y="2683545"/>
-            <a:ext cx="11303" cy="34786"/>
+            <a:off x="9690908" y="3532070"/>
+            <a:ext cx="18190" cy="55983"/>
           </a:xfrm>
           <a:prstGeom prst="line">
             <a:avLst/>
@@ -24563,8 +24563,8 @@
         </p:nvSpPr>
         <p:spPr>
           <a:xfrm flipH="1" flipV="1">
-            <a:off x="9312886" y="2701381"/>
-            <a:ext cx="7605" cy="35777"/>
+            <a:off x="9581527" y="3561378"/>
+            <a:ext cx="12239" cy="57578"/>
           </a:xfrm>
           <a:prstGeom prst="line">
             <a:avLst/>
@@ -24586,8 +24586,8 @@
         </p:nvSpPr>
         <p:spPr>
           <a:xfrm flipH="1" flipV="1">
-            <a:off x="9244822" y="2712161"/>
-            <a:ext cx="3823" cy="36376"/>
+            <a:off x="9469682" y="3579093"/>
+            <a:ext cx="6153" cy="58542"/>
           </a:xfrm>
           <a:prstGeom prst="line">
             <a:avLst/>
@@ -24609,8 +24609,8 @@
         </p:nvSpPr>
         <p:spPr>
           <a:xfrm flipV="1">
-            <a:off x="9176004" y="2671877"/>
-            <a:ext cx="0" cy="80467"/>
+            <a:off x="9356598" y="3514382"/>
+            <a:ext cx="0" cy="129502"/>
           </a:xfrm>
           <a:prstGeom prst="line">
             <a:avLst/>
@@ -24632,8 +24632,8 @@
         </p:nvSpPr>
         <p:spPr>
           <a:xfrm flipV="1">
-            <a:off x="9103363" y="2712161"/>
-            <a:ext cx="3823" cy="36376"/>
+            <a:off x="9237361" y="3579093"/>
+            <a:ext cx="6153" cy="58542"/>
           </a:xfrm>
           <a:prstGeom prst="line">
             <a:avLst/>
@@ -24655,8 +24655,8 @@
         </p:nvSpPr>
         <p:spPr>
           <a:xfrm flipV="1">
-            <a:off x="9031517" y="2701381"/>
-            <a:ext cx="7605" cy="35777"/>
+            <a:off x="9119430" y="3561378"/>
+            <a:ext cx="12239" cy="57578"/>
           </a:xfrm>
           <a:prstGeom prst="line">
             <a:avLst/>
@@ -24678,8 +24678,8 @@
         </p:nvSpPr>
         <p:spPr>
           <a:xfrm flipV="1">
-            <a:off x="8961254" y="2683545"/>
-            <a:ext cx="11303" cy="34786"/>
+            <a:off x="9004098" y="3532070"/>
+            <a:ext cx="18190" cy="55983"/>
           </a:xfrm>
           <a:prstGeom prst="line">
             <a:avLst/>
@@ -24701,8 +24701,8 @@
         </p:nvSpPr>
         <p:spPr>
           <a:xfrm flipV="1">
-            <a:off x="8893345" y="2658849"/>
-            <a:ext cx="14877" cy="33414"/>
+            <a:off x="8892628" y="3491489"/>
+            <a:ext cx="23942" cy="53775"/>
           </a:xfrm>
           <a:prstGeom prst="line">
             <a:avLst/>
@@ -24724,8 +24724,8 @@
         </p:nvSpPr>
         <p:spPr>
           <a:xfrm flipV="1">
-            <a:off x="8828532" y="2589553"/>
-            <a:ext cx="40234" cy="69687"/>
+            <a:off x="8786241" y="3378905"/>
+            <a:ext cx="64751" cy="112152"/>
           </a:xfrm>
           <a:prstGeom prst="line">
             <a:avLst/>
@@ -24747,8 +24747,8 @@
         </p:nvSpPr>
         <p:spPr>
           <a:xfrm flipV="1">
-            <a:off x="8767526" y="2590031"/>
-            <a:ext cx="21499" cy="29591"/>
+            <a:off x="8686103" y="3378405"/>
+            <a:ext cx="34600" cy="47622"/>
           </a:xfrm>
           <a:prstGeom prst="line">
             <a:avLst/>
@@ -24770,8 +24770,8 @@
         </p:nvSpPr>
         <p:spPr>
           <a:xfrm flipV="1">
-            <a:off x="8710996" y="2546663"/>
-            <a:ext cx="24474" cy="27181"/>
+            <a:off x="8593311" y="3307141"/>
+            <a:ext cx="39388" cy="43745"/>
           </a:xfrm>
           <a:prstGeom prst="line">
             <a:avLst/>
@@ -24793,8 +24793,8 @@
         </p:nvSpPr>
         <p:spPr>
           <a:xfrm flipV="1">
-            <a:off x="8659560" y="2497934"/>
-            <a:ext cx="27181" cy="24474"/>
+            <a:off x="8508882" y="3227069"/>
+            <a:ext cx="43745" cy="39388"/>
           </a:xfrm>
           <a:prstGeom prst="line">
             <a:avLst/>
@@ -24816,8 +24816,8 @@
         </p:nvSpPr>
         <p:spPr>
           <a:xfrm flipV="1">
-            <a:off x="8613782" y="2444379"/>
-            <a:ext cx="29591" cy="21499"/>
+            <a:off x="8433741" y="3139065"/>
+            <a:ext cx="47622" cy="34600"/>
           </a:xfrm>
           <a:prstGeom prst="line">
             <a:avLst/>
@@ -24839,8 +24839,8 @@
         </p:nvSpPr>
         <p:spPr>
           <a:xfrm flipV="1">
-            <a:off x="8574165" y="2364638"/>
-            <a:ext cx="69687" cy="40234"/>
+            <a:off x="8368711" y="3008776"/>
+            <a:ext cx="112152" cy="64751"/>
           </a:xfrm>
           <a:prstGeom prst="line">
             <a:avLst/>
@@ -24862,8 +24862,8 @@
         </p:nvSpPr>
         <p:spPr>
           <a:xfrm flipV="1">
-            <a:off x="8541141" y="2325182"/>
-            <a:ext cx="33414" cy="14877"/>
+            <a:off x="8314504" y="2943198"/>
+            <a:ext cx="53775" cy="23942"/>
           </a:xfrm>
           <a:prstGeom prst="line">
             <a:avLst/>
@@ -24885,8 +24885,8 @@
         </p:nvSpPr>
         <p:spPr>
           <a:xfrm flipV="1">
-            <a:off x="8515073" y="2260847"/>
-            <a:ext cx="34786" cy="11303"/>
+            <a:off x="8271715" y="2837480"/>
+            <a:ext cx="55983" cy="18190"/>
           </a:xfrm>
           <a:prstGeom prst="line">
             <a:avLst/>
@@ -24908,8 +24908,8 @@
         </p:nvSpPr>
         <p:spPr>
           <a:xfrm flipV="1">
-            <a:off x="8496246" y="2194282"/>
-            <a:ext cx="35777" cy="7605"/>
+            <a:off x="8240811" y="2728099"/>
+            <a:ext cx="57578" cy="12239"/>
           </a:xfrm>
           <a:prstGeom prst="line">
             <a:avLst/>
@@ -24931,8 +24931,8 @@
         </p:nvSpPr>
         <p:spPr>
           <a:xfrm flipV="1">
-            <a:off x="8484867" y="2126218"/>
-            <a:ext cx="36376" cy="3823"/>
+            <a:off x="8222133" y="2616254"/>
+            <a:ext cx="58542" cy="6153"/>
           </a:xfrm>
           <a:prstGeom prst="line">
             <a:avLst/>
@@ -24953,9 +24953,9 @@
           <p:nvPr/>
         </p:nvSpPr>
         <p:spPr>
-          <a:xfrm>
-            <a:off x="8481060" y="2057400"/>
-            <a:ext cx="80467" cy="0"/>
+          <a:xfrm flipV="1">
+            <a:off x="8215884" y="2503170"/>
+            <a:ext cx="129502" cy="0"/>
           </a:xfrm>
           <a:prstGeom prst="line">
             <a:avLst/>
@@ -24977,8 +24977,8 @@
         </p:nvSpPr>
         <p:spPr>
           <a:xfrm>
-            <a:off x="8484867" y="1984759"/>
-            <a:ext cx="36376" cy="3823"/>
+            <a:off x="8222133" y="2383933"/>
+            <a:ext cx="58542" cy="6153"/>
           </a:xfrm>
           <a:prstGeom prst="line">
             <a:avLst/>
@@ -25000,8 +25000,8 @@
         </p:nvSpPr>
         <p:spPr>
           <a:xfrm>
-            <a:off x="8496246" y="1912913"/>
-            <a:ext cx="35777" cy="7605"/>
+            <a:off x="8240811" y="2266002"/>
+            <a:ext cx="57578" cy="12239"/>
           </a:xfrm>
           <a:prstGeom prst="line">
             <a:avLst/>
@@ -25023,8 +25023,8 @@
         </p:nvSpPr>
         <p:spPr>
           <a:xfrm>
-            <a:off x="8515073" y="1842650"/>
-            <a:ext cx="34786" cy="11303"/>
+            <a:off x="8271715" y="2150670"/>
+            <a:ext cx="55983" cy="18190"/>
           </a:xfrm>
           <a:prstGeom prst="line">
             <a:avLst/>
@@ -25046,8 +25046,8 @@
         </p:nvSpPr>
         <p:spPr>
           <a:xfrm>
-            <a:off x="8541141" y="1774741"/>
-            <a:ext cx="33414" cy="14877"/>
+            <a:off x="8314504" y="2039200"/>
+            <a:ext cx="53775" cy="23942"/>
           </a:xfrm>
           <a:prstGeom prst="line">
             <a:avLst/>
@@ -25069,8 +25069,8 @@
         </p:nvSpPr>
         <p:spPr>
           <a:xfrm>
-            <a:off x="8574165" y="1709928"/>
-            <a:ext cx="69687" cy="40234"/>
+            <a:off x="8368711" y="1932813"/>
+            <a:ext cx="112152" cy="64751"/>
           </a:xfrm>
           <a:prstGeom prst="line">
             <a:avLst/>
@@ -25092,8 +25092,8 @@
         </p:nvSpPr>
         <p:spPr>
           <a:xfrm>
-            <a:off x="8613782" y="1648922"/>
-            <a:ext cx="29591" cy="21499"/>
+            <a:off x="8433741" y="1832675"/>
+            <a:ext cx="47622" cy="34600"/>
           </a:xfrm>
           <a:prstGeom prst="line">
             <a:avLst/>
@@ -25115,8 +25115,8 @@
         </p:nvSpPr>
         <p:spPr>
           <a:xfrm>
-            <a:off x="8659560" y="1592392"/>
-            <a:ext cx="27181" cy="24474"/>
+            <a:off x="8508882" y="1739883"/>
+            <a:ext cx="43745" cy="39388"/>
           </a:xfrm>
           <a:prstGeom prst="line">
             <a:avLst/>
@@ -25138,8 +25138,8 @@
         </p:nvSpPr>
         <p:spPr>
           <a:xfrm>
-            <a:off x="8710996" y="1540956"/>
-            <a:ext cx="24474" cy="27181"/>
+            <a:off x="8593311" y="1655454"/>
+            <a:ext cx="39388" cy="43745"/>
           </a:xfrm>
           <a:prstGeom prst="line">
             <a:avLst/>
@@ -25161,8 +25161,8 @@
         </p:nvSpPr>
         <p:spPr>
           <a:xfrm>
-            <a:off x="8767526" y="1495178"/>
-            <a:ext cx="21499" cy="29591"/>
+            <a:off x="8686103" y="1580313"/>
+            <a:ext cx="34600" cy="47622"/>
           </a:xfrm>
           <a:prstGeom prst="line">
             <a:avLst/>
@@ -25184,8 +25184,8 @@
         </p:nvSpPr>
         <p:spPr>
           <a:xfrm>
-            <a:off x="8828532" y="1455561"/>
-            <a:ext cx="40234" cy="69687"/>
+            <a:off x="8786241" y="1515283"/>
+            <a:ext cx="64751" cy="112152"/>
           </a:xfrm>
           <a:prstGeom prst="line">
             <a:avLst/>
@@ -25207,8 +25207,8 @@
         </p:nvSpPr>
         <p:spPr>
           <a:xfrm>
-            <a:off x="8893345" y="1422537"/>
-            <a:ext cx="14877" cy="33414"/>
+            <a:off x="8892628" y="1461076"/>
+            <a:ext cx="23942" cy="53775"/>
           </a:xfrm>
           <a:prstGeom prst="line">
             <a:avLst/>
@@ -25230,8 +25230,8 @@
         </p:nvSpPr>
         <p:spPr>
           <a:xfrm>
-            <a:off x="8961254" y="1396469"/>
-            <a:ext cx="11303" cy="34786"/>
+            <a:off x="9004098" y="1418287"/>
+            <a:ext cx="18190" cy="55983"/>
           </a:xfrm>
           <a:prstGeom prst="line">
             <a:avLst/>
@@ -25253,8 +25253,8 @@
         </p:nvSpPr>
         <p:spPr>
           <a:xfrm>
-            <a:off x="9031517" y="1377642"/>
-            <a:ext cx="7605" cy="35777"/>
+            <a:off x="9119430" y="1387383"/>
+            <a:ext cx="12239" cy="57578"/>
           </a:xfrm>
           <a:prstGeom prst="line">
             <a:avLst/>
@@ -25276,8 +25276,8 @@
         </p:nvSpPr>
         <p:spPr>
           <a:xfrm>
-            <a:off x="9103363" y="1366263"/>
-            <a:ext cx="3823" cy="36376"/>
+            <a:off x="9237361" y="1368705"/>
+            <a:ext cx="6153" cy="58542"/>
           </a:xfrm>
           <a:prstGeom prst="line">
             <a:avLst/>
@@ -25299,7 +25299,7 @@
         </p:nvSpPr>
         <p:spPr>
           <a:xfrm>
-            <a:off x="9172346" y="1405719"/>
+            <a:off x="9547308" y="1514835"/>
             <a:ext cx="548640" cy="365760"/>
           </a:xfrm>
           <a:prstGeom prst="rect">
@@ -25316,7 +25316,7 @@
               <a:buNone/>
             </a:pPr>
             <a:r>
-              <a:rPr lang="ko-KR" altLang="en-US" sz="1200" b="1" dirty="0">
+              <a:rPr lang="ko-KR" altLang="en-US" sz="1900" b="1" dirty="0">
                 <a:solidFill>
                   <a:srgbClr val="1F2937"/>
                 </a:solidFill>
@@ -25326,7 +25326,7 @@
               </a:rPr>
               <a:t>1</a:t>
             </a:r>
-            <a:endParaRPr lang="ko-KR" sz="1200" dirty="0"/>
+            <a:endParaRPr lang="ko-KR" sz="1900" dirty="0"/>
           </a:p>
         </p:txBody>
       </p:sp>
@@ -25338,7 +25338,7 @@
         </p:nvSpPr>
         <p:spPr>
           <a:xfrm>
-            <a:off x="9370485" y="1603858"/>
+            <a:off x="9887733" y="1855260"/>
             <a:ext cx="548640" cy="365760"/>
           </a:xfrm>
           <a:prstGeom prst="rect">
@@ -25355,7 +25355,7 @@
               <a:buNone/>
             </a:pPr>
             <a:r>
-              <a:rPr lang="ko-KR" altLang="en-US" sz="1200" b="1" dirty="0">
+              <a:rPr lang="ko-KR" altLang="en-US" sz="1900" b="1" dirty="0">
                 <a:solidFill>
                   <a:srgbClr val="1F2937"/>
                 </a:solidFill>
@@ -25365,7 +25365,7 @@
               </a:rPr>
               <a:t>2</a:t>
             </a:r>
-            <a:endParaRPr lang="ko-KR" sz="1200" dirty="0"/>
+            <a:endParaRPr lang="ko-KR" sz="1900" dirty="0"/>
           </a:p>
         </p:txBody>
       </p:sp>
@@ -25377,7 +25377,7 @@
         </p:nvSpPr>
         <p:spPr>
           <a:xfrm>
-            <a:off x="9443009" y="1874520"/>
+            <a:off x="10012337" y="2320290"/>
             <a:ext cx="548640" cy="365760"/>
           </a:xfrm>
           <a:prstGeom prst="rect">
@@ -25394,7 +25394,7 @@
               <a:buNone/>
             </a:pPr>
             <a:r>
-              <a:rPr lang="ko-KR" altLang="en-US" sz="1200" b="1" dirty="0">
+              <a:rPr lang="ko-KR" altLang="en-US" sz="1900" b="1" dirty="0">
                 <a:solidFill>
                   <a:srgbClr val="1F2937"/>
                 </a:solidFill>
@@ -25404,7 +25404,7 @@
               </a:rPr>
               <a:t>3</a:t>
             </a:r>
-            <a:endParaRPr lang="ko-KR" sz="1200" dirty="0"/>
+            <a:endParaRPr lang="ko-KR" sz="1900" dirty="0"/>
           </a:p>
         </p:txBody>
       </p:sp>
@@ -25416,7 +25416,7 @@
         </p:nvSpPr>
         <p:spPr>
           <a:xfrm>
-            <a:off x="9370485" y="2145182"/>
+            <a:off x="9887733" y="2785320"/>
             <a:ext cx="548640" cy="365760"/>
           </a:xfrm>
           <a:prstGeom prst="rect">
@@ -25433,7 +25433,7 @@
               <a:buNone/>
             </a:pPr>
             <a:r>
-              <a:rPr lang="ko-KR" altLang="en-US" sz="1200" b="1" dirty="0">
+              <a:rPr lang="ko-KR" altLang="en-US" sz="1900" b="1" dirty="0">
                 <a:solidFill>
                   <a:srgbClr val="1F2937"/>
                 </a:solidFill>
@@ -25443,7 +25443,7 @@
               </a:rPr>
               <a:t>4</a:t>
             </a:r>
-            <a:endParaRPr lang="ko-KR" sz="1200" dirty="0"/>
+            <a:endParaRPr lang="ko-KR" sz="1900" dirty="0"/>
           </a:p>
         </p:txBody>
       </p:sp>
@@ -25455,7 +25455,7 @@
         </p:nvSpPr>
         <p:spPr>
           <a:xfrm>
-            <a:off x="9172346" y="2343321"/>
+            <a:off x="9547308" y="3125745"/>
             <a:ext cx="548640" cy="365760"/>
           </a:xfrm>
           <a:prstGeom prst="rect">
@@ -25472,7 +25472,7 @@
               <a:buNone/>
             </a:pPr>
             <a:r>
-              <a:rPr lang="ko-KR" altLang="en-US" sz="1200" b="1" dirty="0">
+              <a:rPr lang="ko-KR" altLang="en-US" sz="1900" b="1" dirty="0">
                 <a:solidFill>
                   <a:srgbClr val="1F2937"/>
                 </a:solidFill>
@@ -25482,7 +25482,7 @@
               </a:rPr>
               <a:t>5</a:t>
             </a:r>
-            <a:endParaRPr lang="ko-KR" sz="1200" dirty="0"/>
+            <a:endParaRPr lang="ko-KR" sz="1900" dirty="0"/>
           </a:p>
         </p:txBody>
       </p:sp>
@@ -25494,7 +25494,7 @@
         </p:nvSpPr>
         <p:spPr>
           <a:xfrm>
-            <a:off x="8901684" y="2415845"/>
+            <a:off x="9082278" y="3250349"/>
             <a:ext cx="548640" cy="365760"/>
           </a:xfrm>
           <a:prstGeom prst="rect">
@@ -25511,7 +25511,7 @@
               <a:buNone/>
             </a:pPr>
             <a:r>
-              <a:rPr lang="ko-KR" altLang="en-US" sz="1200" b="1" dirty="0">
+              <a:rPr lang="ko-KR" altLang="en-US" sz="1900" b="1" dirty="0">
                 <a:solidFill>
                   <a:srgbClr val="1F2937"/>
                 </a:solidFill>
@@ -25521,7 +25521,7 @@
               </a:rPr>
               <a:t>6</a:t>
             </a:r>
-            <a:endParaRPr lang="ko-KR" sz="1200" dirty="0"/>
+            <a:endParaRPr lang="ko-KR" sz="1900" dirty="0"/>
           </a:p>
         </p:txBody>
       </p:sp>
@@ -25533,7 +25533,7 @@
         </p:nvSpPr>
         <p:spPr>
           <a:xfrm>
-            <a:off x="8631022" y="2343321"/>
+            <a:off x="8617248" y="3125745"/>
             <a:ext cx="548640" cy="365760"/>
           </a:xfrm>
           <a:prstGeom prst="rect">
@@ -25550,7 +25550,7 @@
               <a:buNone/>
             </a:pPr>
             <a:r>
-              <a:rPr lang="ko-KR" altLang="en-US" sz="1200" b="1" dirty="0">
+              <a:rPr lang="ko-KR" altLang="en-US" sz="1900" b="1" dirty="0">
                 <a:solidFill>
                   <a:srgbClr val="1F2937"/>
                 </a:solidFill>
@@ -25560,7 +25560,7 @@
               </a:rPr>
               <a:t>7</a:t>
             </a:r>
-            <a:endParaRPr lang="ko-KR" sz="1200" dirty="0"/>
+            <a:endParaRPr lang="ko-KR" sz="1900" dirty="0"/>
           </a:p>
         </p:txBody>
       </p:sp>
@@ -25572,7 +25572,7 @@
         </p:nvSpPr>
         <p:spPr>
           <a:xfrm>
-            <a:off x="8432883" y="2145182"/>
+            <a:off x="8276823" y="2785320"/>
             <a:ext cx="548640" cy="365760"/>
           </a:xfrm>
           <a:prstGeom prst="rect">
@@ -25589,7 +25589,7 @@
               <a:buNone/>
             </a:pPr>
             <a:r>
-              <a:rPr lang="ko-KR" altLang="en-US" sz="1200" b="1" dirty="0">
+              <a:rPr lang="ko-KR" altLang="en-US" sz="1900" b="1" dirty="0">
                 <a:solidFill>
                   <a:srgbClr val="1F2937"/>
                 </a:solidFill>
@@ -25599,7 +25599,7 @@
               </a:rPr>
               <a:t>8</a:t>
             </a:r>
-            <a:endParaRPr lang="ko-KR" sz="1200" dirty="0"/>
+            <a:endParaRPr lang="ko-KR" sz="1900" dirty="0"/>
           </a:p>
         </p:txBody>
       </p:sp>
@@ -25611,7 +25611,7 @@
         </p:nvSpPr>
         <p:spPr>
           <a:xfrm>
-            <a:off x="8360359" y="1874520"/>
+            <a:off x="8152219" y="2320290"/>
             <a:ext cx="548640" cy="365760"/>
           </a:xfrm>
           <a:prstGeom prst="rect">
@@ -25628,7 +25628,7 @@
               <a:buNone/>
             </a:pPr>
             <a:r>
-              <a:rPr lang="ko-KR" altLang="en-US" sz="1200" b="1" dirty="0">
+              <a:rPr lang="ko-KR" altLang="en-US" sz="1900" b="1" dirty="0">
                 <a:solidFill>
                   <a:srgbClr val="1F2937"/>
                 </a:solidFill>
@@ -25638,7 +25638,7 @@
               </a:rPr>
               <a:t>9</a:t>
             </a:r>
-            <a:endParaRPr lang="ko-KR" sz="1200" dirty="0"/>
+            <a:endParaRPr lang="ko-KR" sz="1900" dirty="0"/>
           </a:p>
         </p:txBody>
       </p:sp>
@@ -25650,7 +25650,7 @@
         </p:nvSpPr>
         <p:spPr>
           <a:xfrm>
-            <a:off x="8432883" y="1603858"/>
+            <a:off x="8276823" y="1855260"/>
             <a:ext cx="548640" cy="365760"/>
           </a:xfrm>
           <a:prstGeom prst="rect">
@@ -25667,7 +25667,7 @@
               <a:buNone/>
             </a:pPr>
             <a:r>
-              <a:rPr lang="ko-KR" altLang="en-US" sz="1200" b="1" dirty="0">
+              <a:rPr lang="ko-KR" altLang="en-US" sz="1900" b="1" dirty="0">
                 <a:solidFill>
                   <a:srgbClr val="1F2937"/>
                 </a:solidFill>
@@ -25677,7 +25677,7 @@
               </a:rPr>
               <a:t>10</a:t>
             </a:r>
-            <a:endParaRPr lang="ko-KR" sz="1200" dirty="0"/>
+            <a:endParaRPr lang="ko-KR" sz="1900" dirty="0"/>
           </a:p>
         </p:txBody>
       </p:sp>
@@ -25689,7 +25689,7 @@
         </p:nvSpPr>
         <p:spPr>
           <a:xfrm>
-            <a:off x="8631022" y="1405719"/>
+            <a:off x="8617248" y="1514835"/>
             <a:ext cx="548640" cy="365760"/>
           </a:xfrm>
           <a:prstGeom prst="rect">
@@ -25706,7 +25706,7 @@
               <a:buNone/>
             </a:pPr>
             <a:r>
-              <a:rPr lang="ko-KR" altLang="en-US" sz="1200" b="1" dirty="0">
+              <a:rPr lang="ko-KR" altLang="en-US" sz="1900" b="1" dirty="0">
                 <a:solidFill>
                   <a:srgbClr val="1F2937"/>
                 </a:solidFill>
@@ -25716,7 +25716,7 @@
               </a:rPr>
               <a:t>11</a:t>
             </a:r>
-            <a:endParaRPr lang="ko-KR" sz="1200" dirty="0"/>
+            <a:endParaRPr lang="ko-KR" sz="1900" dirty="0"/>
           </a:p>
         </p:txBody>
       </p:sp>
@@ -25728,7 +25728,7 @@
         </p:nvSpPr>
         <p:spPr>
           <a:xfrm>
-            <a:off x="8901684" y="1333195"/>
+            <a:off x="9082278" y="1390231"/>
             <a:ext cx="548640" cy="365760"/>
           </a:xfrm>
           <a:prstGeom prst="rect">
@@ -25745,7 +25745,7 @@
               <a:buNone/>
             </a:pPr>
             <a:r>
-              <a:rPr lang="ko-KR" altLang="en-US" sz="1200" b="1" dirty="0">
+              <a:rPr lang="ko-KR" altLang="en-US" sz="1900" b="1" dirty="0">
                 <a:solidFill>
                   <a:srgbClr val="1F2937"/>
                 </a:solidFill>
@@ -25755,7 +25755,7 @@
               </a:rPr>
               <a:t>12</a:t>
             </a:r>
-            <a:endParaRPr lang="ko-KR" sz="1200" dirty="0"/>
+            <a:endParaRPr lang="ko-KR" sz="1900" dirty="0"/>
           </a:p>
         </p:txBody>
       </p:sp>
@@ -25767,8 +25767,8 @@
         </p:nvSpPr>
         <p:spPr>
           <a:xfrm flipH="1">
-            <a:off x="8917373" y="2057400"/>
-            <a:ext cx="258631" cy="258631"/>
+            <a:off x="8990311" y="2503170"/>
+            <a:ext cx="366287" cy="366287"/>
           </a:xfrm>
           <a:prstGeom prst="line">
             <a:avLst/>
@@ -25790,8 +25790,8 @@
         </p:nvSpPr>
         <p:spPr>
           <a:xfrm>
-            <a:off x="9176004" y="2057400"/>
-            <a:ext cx="0" cy="570586"/>
+            <a:off x="9356598" y="2503170"/>
+            <a:ext cx="0" cy="753466"/>
           </a:xfrm>
           <a:prstGeom prst="line">
             <a:avLst/>
@@ -25813,7 +25813,7 @@
         </p:nvSpPr>
         <p:spPr>
           <a:xfrm>
-            <a:off x="9121140" y="2002536"/>
+            <a:off x="9301734" y="2448306"/>
             <a:ext cx="109728" cy="109728"/>
           </a:xfrm>
           <a:prstGeom prst="ellipse">
@@ -27657,7 +27657,7 @@
         </p:nvSpPr>
         <p:spPr>
           <a:xfrm>
-            <a:off x="3450415" y="2308901"/>
+            <a:off x="3483835" y="2251015"/>
             <a:ext cx="548640" cy="365760"/>
           </a:xfrm>
           <a:prstGeom prst="rect">
@@ -27696,7 +27696,7 @@
         </p:nvSpPr>
         <p:spPr>
           <a:xfrm>
-            <a:off x="3812499" y="2670985"/>
+            <a:off x="3870385" y="2637565"/>
             <a:ext cx="548640" cy="365760"/>
           </a:xfrm>
           <a:prstGeom prst="rect">
@@ -27735,7 +27735,7 @@
         </p:nvSpPr>
         <p:spPr>
           <a:xfrm>
-            <a:off x="3945031" y="3165602"/>
+            <a:off x="4011872" y="3165602"/>
             <a:ext cx="548640" cy="365760"/>
           </a:xfrm>
           <a:prstGeom prst="rect">
@@ -27774,7 +27774,7 @@
         </p:nvSpPr>
         <p:spPr>
           <a:xfrm>
-            <a:off x="3812499" y="3660219"/>
+            <a:off x="3870385" y="3693639"/>
             <a:ext cx="548640" cy="365760"/>
           </a:xfrm>
           <a:prstGeom prst="rect">
@@ -27813,7 +27813,7 @@
         </p:nvSpPr>
         <p:spPr>
           <a:xfrm>
-            <a:off x="3450415" y="4022303"/>
+            <a:off x="3483835" y="4080189"/>
             <a:ext cx="548640" cy="365760"/>
           </a:xfrm>
           <a:prstGeom prst="rect">
@@ -27852,7 +27852,7 @@
         </p:nvSpPr>
         <p:spPr>
           <a:xfrm>
-            <a:off x="2955798" y="4154835"/>
+            <a:off x="2955798" y="4221676"/>
             <a:ext cx="548640" cy="365760"/>
           </a:xfrm>
           <a:prstGeom prst="rect">
@@ -27891,7 +27891,7 @@
         </p:nvSpPr>
         <p:spPr>
           <a:xfrm>
-            <a:off x="2461181" y="4022303"/>
+            <a:off x="2427761" y="4080189"/>
             <a:ext cx="548640" cy="365760"/>
           </a:xfrm>
           <a:prstGeom prst="rect">
@@ -27930,7 +27930,7 @@
         </p:nvSpPr>
         <p:spPr>
           <a:xfrm>
-            <a:off x="2099097" y="3660219"/>
+            <a:off x="2041211" y="3693639"/>
             <a:ext cx="548640" cy="365760"/>
           </a:xfrm>
           <a:prstGeom prst="rect">
@@ -27969,7 +27969,7 @@
         </p:nvSpPr>
         <p:spPr>
           <a:xfrm>
-            <a:off x="1966565" y="3165602"/>
+            <a:off x="1899724" y="3165602"/>
             <a:ext cx="548640" cy="365760"/>
           </a:xfrm>
           <a:prstGeom prst="rect">
@@ -28008,7 +28008,7 @@
         </p:nvSpPr>
         <p:spPr>
           <a:xfrm>
-            <a:off x="2099097" y="2670985"/>
+            <a:off x="2041211" y="2637565"/>
             <a:ext cx="548640" cy="365760"/>
           </a:xfrm>
           <a:prstGeom prst="rect">
@@ -28047,7 +28047,7 @@
         </p:nvSpPr>
         <p:spPr>
           <a:xfrm>
-            <a:off x="2461181" y="2308901"/>
+            <a:off x="2427761" y="2251015"/>
             <a:ext cx="548640" cy="365760"/>
           </a:xfrm>
           <a:prstGeom prst="rect">
@@ -28086,7 +28086,7 @@
         </p:nvSpPr>
         <p:spPr>
           <a:xfrm>
-            <a:off x="2955798" y="2176369"/>
+            <a:off x="2955798" y="2109528"/>
             <a:ext cx="548640" cy="365760"/>
           </a:xfrm>
           <a:prstGeom prst="rect">
@@ -28125,8 +28125,8 @@
         </p:nvSpPr>
         <p:spPr>
           <a:xfrm flipV="1">
-            <a:off x="3230118" y="3092696"/>
-            <a:ext cx="617522" cy="255786"/>
+            <a:off x="3230118" y="3123390"/>
+            <a:ext cx="543419" cy="225092"/>
           </a:xfrm>
           <a:prstGeom prst="line">
             <a:avLst/>
@@ -28149,7 +28149,7 @@
         <p:spPr>
           <a:xfrm>
             <a:off x="3230118" y="3348482"/>
-            <a:ext cx="1042706" cy="0"/>
+            <a:ext cx="855553" cy="0"/>
           </a:xfrm>
           <a:prstGeom prst="line">
             <a:avLst/>
@@ -29892,7 +29892,7 @@
         </p:nvSpPr>
         <p:spPr>
           <a:xfrm>
-            <a:off x="9903226" y="3232898"/>
+            <a:off x="9942088" y="3165587"/>
             <a:ext cx="548640" cy="365760"/>
           </a:xfrm>
           <a:prstGeom prst="rect">
@@ -29931,7 +29931,7 @@
         </p:nvSpPr>
         <p:spPr>
           <a:xfrm>
-            <a:off x="10324271" y="3653942"/>
+            <a:off x="10391582" y="3615080"/>
             <a:ext cx="548640" cy="365760"/>
           </a:xfrm>
           <a:prstGeom prst="rect">
@@ -29970,7 +29970,7 @@
         </p:nvSpPr>
         <p:spPr>
           <a:xfrm>
-            <a:off x="10478384" y="4229100"/>
+            <a:off x="10556108" y="4229100"/>
             <a:ext cx="548640" cy="365760"/>
           </a:xfrm>
           <a:prstGeom prst="rect">
@@ -30009,7 +30009,7 @@
         </p:nvSpPr>
         <p:spPr>
           <a:xfrm>
-            <a:off x="10324271" y="4804258"/>
+            <a:off x="10391582" y="4843120"/>
             <a:ext cx="548640" cy="365760"/>
           </a:xfrm>
           <a:prstGeom prst="rect">
@@ -30048,7 +30048,7 @@
         </p:nvSpPr>
         <p:spPr>
           <a:xfrm>
-            <a:off x="9903226" y="5225302"/>
+            <a:off x="9942088" y="5292613"/>
             <a:ext cx="548640" cy="365760"/>
           </a:xfrm>
           <a:prstGeom prst="rect">
@@ -30087,7 +30087,7 @@
         </p:nvSpPr>
         <p:spPr>
           <a:xfrm>
-            <a:off x="9328069" y="5379415"/>
+            <a:off x="9328069" y="5457139"/>
             <a:ext cx="548640" cy="365760"/>
           </a:xfrm>
           <a:prstGeom prst="rect">
@@ -30126,7 +30126,7 @@
         </p:nvSpPr>
         <p:spPr>
           <a:xfrm>
-            <a:off x="8752911" y="5225302"/>
+            <a:off x="8714049" y="5292613"/>
             <a:ext cx="548640" cy="365760"/>
           </a:xfrm>
           <a:prstGeom prst="rect">
@@ -30165,7 +30165,7 @@
         </p:nvSpPr>
         <p:spPr>
           <a:xfrm>
-            <a:off x="8331867" y="4804258"/>
+            <a:off x="8264556" y="4843120"/>
             <a:ext cx="548640" cy="365760"/>
           </a:xfrm>
           <a:prstGeom prst="rect">
@@ -30204,7 +30204,7 @@
         </p:nvSpPr>
         <p:spPr>
           <a:xfrm>
-            <a:off x="8177754" y="4229100"/>
+            <a:off x="8100030" y="4229100"/>
             <a:ext cx="548640" cy="365760"/>
           </a:xfrm>
           <a:prstGeom prst="rect">
@@ -30243,7 +30243,7 @@
         </p:nvSpPr>
         <p:spPr>
           <a:xfrm>
-            <a:off x="8331867" y="3653942"/>
+            <a:off x="8264556" y="3615080"/>
             <a:ext cx="548640" cy="365760"/>
           </a:xfrm>
           <a:prstGeom prst="rect">
@@ -30282,7 +30282,7 @@
         </p:nvSpPr>
         <p:spPr>
           <a:xfrm>
-            <a:off x="8752911" y="3232898"/>
+            <a:off x="8714049" y="3165587"/>
             <a:ext cx="548640" cy="365760"/>
           </a:xfrm>
           <a:prstGeom prst="rect">
@@ -30321,7 +30321,7 @@
         </p:nvSpPr>
         <p:spPr>
           <a:xfrm>
-            <a:off x="9328069" y="3078785"/>
+            <a:off x="9328069" y="3001061"/>
             <a:ext cx="548640" cy="365760"/>
           </a:xfrm>
           <a:prstGeom prst="rect">
@@ -30361,7 +30361,7 @@
         <p:spPr>
           <a:xfrm>
             <a:off x="9602389" y="4411980"/>
-            <a:ext cx="525096" cy="573041"/>
+            <a:ext cx="462084" cy="504276"/>
           </a:xfrm>
           <a:prstGeom prst="line">
             <a:avLst/>
@@ -30383,8 +30383,8 @@
         </p:nvSpPr>
         <p:spPr>
           <a:xfrm flipH="1">
-            <a:off x="8996142" y="4411980"/>
-            <a:ext cx="606247" cy="1050051"/>
+            <a:off x="9104955" y="4411980"/>
+            <a:ext cx="497434" cy="861580"/>
           </a:xfrm>
           <a:prstGeom prst="line">
             <a:avLst/>
@@ -32330,7 +32330,7 @@
         </p:nvSpPr>
         <p:spPr>
           <a:xfrm>
-            <a:off x="3450415" y="2308901"/>
+            <a:off x="3483835" y="2251015"/>
             <a:ext cx="548640" cy="365760"/>
           </a:xfrm>
           <a:prstGeom prst="rect">
@@ -32369,7 +32369,7 @@
         </p:nvSpPr>
         <p:spPr>
           <a:xfrm>
-            <a:off x="3812499" y="2670985"/>
+            <a:off x="3870385" y="2637565"/>
             <a:ext cx="548640" cy="365760"/>
           </a:xfrm>
           <a:prstGeom prst="rect">
@@ -32408,7 +32408,7 @@
         </p:nvSpPr>
         <p:spPr>
           <a:xfrm>
-            <a:off x="3945031" y="3165602"/>
+            <a:off x="4011872" y="3165602"/>
             <a:ext cx="548640" cy="365760"/>
           </a:xfrm>
           <a:prstGeom prst="rect">
@@ -32447,7 +32447,7 @@
         </p:nvSpPr>
         <p:spPr>
           <a:xfrm>
-            <a:off x="3812499" y="3660219"/>
+            <a:off x="3870385" y="3693639"/>
             <a:ext cx="548640" cy="365760"/>
           </a:xfrm>
           <a:prstGeom prst="rect">
@@ -32486,7 +32486,7 @@
         </p:nvSpPr>
         <p:spPr>
           <a:xfrm>
-            <a:off x="3450415" y="4022303"/>
+            <a:off x="3483835" y="4080189"/>
             <a:ext cx="548640" cy="365760"/>
           </a:xfrm>
           <a:prstGeom prst="rect">
@@ -32525,7 +32525,7 @@
         </p:nvSpPr>
         <p:spPr>
           <a:xfrm>
-            <a:off x="2955798" y="4154835"/>
+            <a:off x="2955798" y="4221676"/>
             <a:ext cx="548640" cy="365760"/>
           </a:xfrm>
           <a:prstGeom prst="rect">
@@ -32564,7 +32564,7 @@
         </p:nvSpPr>
         <p:spPr>
           <a:xfrm>
-            <a:off x="2461181" y="4022303"/>
+            <a:off x="2427761" y="4080189"/>
             <a:ext cx="548640" cy="365760"/>
           </a:xfrm>
           <a:prstGeom prst="rect">
@@ -32603,7 +32603,7 @@
         </p:nvSpPr>
         <p:spPr>
           <a:xfrm>
-            <a:off x="2099097" y="3660219"/>
+            <a:off x="2041211" y="3693639"/>
             <a:ext cx="548640" cy="365760"/>
           </a:xfrm>
           <a:prstGeom prst="rect">
@@ -32642,7 +32642,7 @@
         </p:nvSpPr>
         <p:spPr>
           <a:xfrm>
-            <a:off x="1966565" y="3165602"/>
+            <a:off x="1899724" y="3165602"/>
             <a:ext cx="548640" cy="365760"/>
           </a:xfrm>
           <a:prstGeom prst="rect">
@@ -32681,7 +32681,7 @@
         </p:nvSpPr>
         <p:spPr>
           <a:xfrm>
-            <a:off x="2099097" y="2670985"/>
+            <a:off x="2041211" y="2637565"/>
             <a:ext cx="548640" cy="365760"/>
           </a:xfrm>
           <a:prstGeom prst="rect">
@@ -32720,7 +32720,7 @@
         </p:nvSpPr>
         <p:spPr>
           <a:xfrm>
-            <a:off x="2461181" y="2308901"/>
+            <a:off x="2427761" y="2251015"/>
             <a:ext cx="548640" cy="365760"/>
           </a:xfrm>
           <a:prstGeom prst="rect">
@@ -32759,7 +32759,7 @@
         </p:nvSpPr>
         <p:spPr>
           <a:xfrm>
-            <a:off x="2955798" y="2176369"/>
+            <a:off x="2955798" y="2109528"/>
             <a:ext cx="548640" cy="365760"/>
           </a:xfrm>
           <a:prstGeom prst="rect">
@@ -32798,8 +32798,8 @@
         </p:nvSpPr>
         <p:spPr>
           <a:xfrm flipH="1" flipV="1">
-            <a:off x="2569059" y="3249686"/>
-            <a:ext cx="661059" cy="98796"/>
+            <a:off x="2648386" y="3261542"/>
+            <a:ext cx="581732" cy="86940"/>
           </a:xfrm>
           <a:prstGeom prst="line">
             <a:avLst/>
@@ -32822,7 +32822,7 @@
         <p:spPr>
           <a:xfrm>
             <a:off x="3230118" y="3348482"/>
-            <a:ext cx="1019920" cy="216791"/>
+            <a:ext cx="836857" cy="177880"/>
           </a:xfrm>
           <a:prstGeom prst="line">
             <a:avLst/>
@@ -34595,7 +34595,7 @@
         </p:nvSpPr>
         <p:spPr>
           <a:xfrm>
-            <a:off x="2591410" y="1784717"/>
+            <a:off x="2630272" y="1717406"/>
             <a:ext cx="548640" cy="365760"/>
           </a:xfrm>
           <a:prstGeom prst="rect">
@@ -34634,7 +34634,7 @@
         </p:nvSpPr>
         <p:spPr>
           <a:xfrm>
-            <a:off x="3012454" y="2205761"/>
+            <a:off x="3079765" y="2166899"/>
             <a:ext cx="548640" cy="365760"/>
           </a:xfrm>
           <a:prstGeom prst="rect">
@@ -34673,7 +34673,7 @@
         </p:nvSpPr>
         <p:spPr>
           <a:xfrm>
-            <a:off x="3166567" y="2780919"/>
+            <a:off x="3244291" y="2780919"/>
             <a:ext cx="548640" cy="365760"/>
           </a:xfrm>
           <a:prstGeom prst="rect">
@@ -34712,7 +34712,7 @@
         </p:nvSpPr>
         <p:spPr>
           <a:xfrm>
-            <a:off x="3012454" y="3356077"/>
+            <a:off x="3079765" y="3394939"/>
             <a:ext cx="548640" cy="365760"/>
           </a:xfrm>
           <a:prstGeom prst="rect">
@@ -34751,7 +34751,7 @@
         </p:nvSpPr>
         <p:spPr>
           <a:xfrm>
-            <a:off x="2591410" y="3777121"/>
+            <a:off x="2630272" y="3844432"/>
             <a:ext cx="548640" cy="365760"/>
           </a:xfrm>
           <a:prstGeom prst="rect">
@@ -34790,7 +34790,7 @@
         </p:nvSpPr>
         <p:spPr>
           <a:xfrm>
-            <a:off x="2016252" y="3931234"/>
+            <a:off x="2016252" y="4008958"/>
             <a:ext cx="548640" cy="365760"/>
           </a:xfrm>
           <a:prstGeom prst="rect">
@@ -34829,7 +34829,7 @@
         </p:nvSpPr>
         <p:spPr>
           <a:xfrm>
-            <a:off x="1441094" y="3777121"/>
+            <a:off x="1402232" y="3844432"/>
             <a:ext cx="548640" cy="365760"/>
           </a:xfrm>
           <a:prstGeom prst="rect">
@@ -34868,7 +34868,7 @@
         </p:nvSpPr>
         <p:spPr>
           <a:xfrm>
-            <a:off x="1020050" y="3356077"/>
+            <a:off x="952739" y="3394939"/>
             <a:ext cx="548640" cy="365760"/>
           </a:xfrm>
           <a:prstGeom prst="rect">
@@ -34907,7 +34907,7 @@
         </p:nvSpPr>
         <p:spPr>
           <a:xfrm>
-            <a:off x="865937" y="2780919"/>
+            <a:off x="788213" y="2780919"/>
             <a:ext cx="548640" cy="365760"/>
           </a:xfrm>
           <a:prstGeom prst="rect">
@@ -34946,7 +34946,7 @@
         </p:nvSpPr>
         <p:spPr>
           <a:xfrm>
-            <a:off x="1020050" y="2205761"/>
+            <a:off x="952739" y="2166899"/>
             <a:ext cx="548640" cy="365760"/>
           </a:xfrm>
           <a:prstGeom prst="rect">
@@ -34985,7 +34985,7 @@
         </p:nvSpPr>
         <p:spPr>
           <a:xfrm>
-            <a:off x="1441094" y="1784717"/>
+            <a:off x="1402232" y="1717406"/>
             <a:ext cx="548640" cy="365760"/>
           </a:xfrm>
           <a:prstGeom prst="rect">
@@ -35024,7 +35024,7 @@
         </p:nvSpPr>
         <p:spPr>
           <a:xfrm>
-            <a:off x="2016252" y="1630604"/>
+            <a:off x="2016252" y="1552880"/>
             <a:ext cx="548640" cy="365760"/>
           </a:xfrm>
           <a:prstGeom prst="rect">
@@ -35063,8 +35063,8 @@
         </p:nvSpPr>
         <p:spPr>
           <a:xfrm flipH="1">
-            <a:off x="2155606" y="2963799"/>
-            <a:ext cx="134966" cy="765432"/>
+            <a:off x="2171802" y="2963799"/>
+            <a:ext cx="118770" cy="673580"/>
           </a:xfrm>
           <a:prstGeom prst="line">
             <a:avLst/>
@@ -35087,7 +35087,7 @@
         <p:spPr>
           <a:xfrm>
             <a:off x="2290572" y="2963799"/>
-            <a:ext cx="1050051" cy="606247"/>
+            <a:ext cx="861580" cy="497434"/>
           </a:xfrm>
           <a:prstGeom prst="line">
             <a:avLst/>
@@ -36578,7 +36578,7 @@
         </p:nvSpPr>
         <p:spPr>
           <a:xfrm>
-            <a:off x="6395314" y="1784717"/>
+            <a:off x="6434176" y="1717406"/>
             <a:ext cx="548640" cy="365760"/>
           </a:xfrm>
           <a:prstGeom prst="rect">
@@ -36617,7 +36617,7 @@
         </p:nvSpPr>
         <p:spPr>
           <a:xfrm>
-            <a:off x="6816358" y="2205761"/>
+            <a:off x="6883669" y="2166899"/>
             <a:ext cx="548640" cy="365760"/>
           </a:xfrm>
           <a:prstGeom prst="rect">
@@ -36656,7 +36656,7 @@
         </p:nvSpPr>
         <p:spPr>
           <a:xfrm>
-            <a:off x="6970471" y="2780919"/>
+            <a:off x="7048195" y="2780919"/>
             <a:ext cx="548640" cy="365760"/>
           </a:xfrm>
           <a:prstGeom prst="rect">
@@ -36695,7 +36695,7 @@
         </p:nvSpPr>
         <p:spPr>
           <a:xfrm>
-            <a:off x="6816358" y="3356077"/>
+            <a:off x="6883669" y="3394939"/>
             <a:ext cx="548640" cy="365760"/>
           </a:xfrm>
           <a:prstGeom prst="rect">
@@ -36734,7 +36734,7 @@
         </p:nvSpPr>
         <p:spPr>
           <a:xfrm>
-            <a:off x="6395314" y="3777121"/>
+            <a:off x="6434176" y="3844432"/>
             <a:ext cx="548640" cy="365760"/>
           </a:xfrm>
           <a:prstGeom prst="rect">
@@ -36773,7 +36773,7 @@
         </p:nvSpPr>
         <p:spPr>
           <a:xfrm>
-            <a:off x="5820156" y="3931234"/>
+            <a:off x="5820156" y="4008958"/>
             <a:ext cx="548640" cy="365760"/>
           </a:xfrm>
           <a:prstGeom prst="rect">
@@ -36812,7 +36812,7 @@
         </p:nvSpPr>
         <p:spPr>
           <a:xfrm>
-            <a:off x="5244998" y="3777121"/>
+            <a:off x="5206136" y="3844432"/>
             <a:ext cx="548640" cy="365760"/>
           </a:xfrm>
           <a:prstGeom prst="rect">
@@ -36851,7 +36851,7 @@
         </p:nvSpPr>
         <p:spPr>
           <a:xfrm>
-            <a:off x="4823954" y="3356077"/>
+            <a:off x="4756643" y="3394939"/>
             <a:ext cx="548640" cy="365760"/>
           </a:xfrm>
           <a:prstGeom prst="rect">
@@ -36890,7 +36890,7 @@
         </p:nvSpPr>
         <p:spPr>
           <a:xfrm>
-            <a:off x="4669841" y="2780919"/>
+            <a:off x="4592117" y="2780919"/>
             <a:ext cx="548640" cy="365760"/>
           </a:xfrm>
           <a:prstGeom prst="rect">
@@ -36929,7 +36929,7 @@
         </p:nvSpPr>
         <p:spPr>
           <a:xfrm>
-            <a:off x="4823954" y="2205761"/>
+            <a:off x="4756643" y="2166899"/>
             <a:ext cx="548640" cy="365760"/>
           </a:xfrm>
           <a:prstGeom prst="rect">
@@ -36968,7 +36968,7 @@
         </p:nvSpPr>
         <p:spPr>
           <a:xfrm>
-            <a:off x="5244998" y="1784717"/>
+            <a:off x="5206136" y="1717406"/>
             <a:ext cx="548640" cy="365760"/>
           </a:xfrm>
           <a:prstGeom prst="rect">
@@ -37007,7 +37007,7 @@
         </p:nvSpPr>
         <p:spPr>
           <a:xfrm>
-            <a:off x="5820156" y="1630604"/>
+            <a:off x="5820156" y="1552880"/>
             <a:ext cx="548640" cy="365760"/>
           </a:xfrm>
           <a:prstGeom prst="rect">
@@ -37046,8 +37046,8 @@
         </p:nvSpPr>
         <p:spPr>
           <a:xfrm flipH="1" flipV="1">
-            <a:off x="5993026" y="2193208"/>
-            <a:ext cx="101450" cy="770591"/>
+            <a:off x="6005200" y="2285679"/>
+            <a:ext cx="89276" cy="678120"/>
           </a:xfrm>
           <a:prstGeom prst="line">
             <a:avLst/>
@@ -37069,8 +37069,8 @@
         </p:nvSpPr>
         <p:spPr>
           <a:xfrm flipH="1">
-            <a:off x="4881982" y="2963799"/>
-            <a:ext cx="1212494" cy="0"/>
+            <a:off x="5099609" y="2963799"/>
+            <a:ext cx="994867" cy="0"/>
           </a:xfrm>
           <a:prstGeom prst="line">
             <a:avLst/>
@@ -38561,7 +38561,7 @@
         </p:nvSpPr>
         <p:spPr>
           <a:xfrm>
-            <a:off x="10199218" y="1784717"/>
+            <a:off x="10238080" y="1717406"/>
             <a:ext cx="548640" cy="365760"/>
           </a:xfrm>
           <a:prstGeom prst="rect">
@@ -38600,7 +38600,7 @@
         </p:nvSpPr>
         <p:spPr>
           <a:xfrm>
-            <a:off x="10620262" y="2205761"/>
+            <a:off x="10687573" y="2166899"/>
             <a:ext cx="548640" cy="365760"/>
           </a:xfrm>
           <a:prstGeom prst="rect">
@@ -38639,7 +38639,7 @@
         </p:nvSpPr>
         <p:spPr>
           <a:xfrm>
-            <a:off x="10774375" y="2780919"/>
+            <a:off x="10852099" y="2780919"/>
             <a:ext cx="548640" cy="365760"/>
           </a:xfrm>
           <a:prstGeom prst="rect">
@@ -38678,7 +38678,7 @@
         </p:nvSpPr>
         <p:spPr>
           <a:xfrm>
-            <a:off x="10620262" y="3356077"/>
+            <a:off x="10687573" y="3394939"/>
             <a:ext cx="548640" cy="365760"/>
           </a:xfrm>
           <a:prstGeom prst="rect">
@@ -38717,7 +38717,7 @@
         </p:nvSpPr>
         <p:spPr>
           <a:xfrm>
-            <a:off x="10199218" y="3777121"/>
+            <a:off x="10238080" y="3844432"/>
             <a:ext cx="548640" cy="365760"/>
           </a:xfrm>
           <a:prstGeom prst="rect">
@@ -38756,7 +38756,7 @@
         </p:nvSpPr>
         <p:spPr>
           <a:xfrm>
-            <a:off x="9624060" y="3931234"/>
+            <a:off x="9624060" y="4008958"/>
             <a:ext cx="548640" cy="365760"/>
           </a:xfrm>
           <a:prstGeom prst="rect">
@@ -38795,7 +38795,7 @@
         </p:nvSpPr>
         <p:spPr>
           <a:xfrm>
-            <a:off x="9048902" y="3777121"/>
+            <a:off x="9010040" y="3844432"/>
             <a:ext cx="548640" cy="365760"/>
           </a:xfrm>
           <a:prstGeom prst="rect">
@@ -38834,7 +38834,7 @@
         </p:nvSpPr>
         <p:spPr>
           <a:xfrm>
-            <a:off x="8627858" y="3356077"/>
+            <a:off x="8560547" y="3394939"/>
             <a:ext cx="548640" cy="365760"/>
           </a:xfrm>
           <a:prstGeom prst="rect">
@@ -38873,7 +38873,7 @@
         </p:nvSpPr>
         <p:spPr>
           <a:xfrm>
-            <a:off x="8473745" y="2780919"/>
+            <a:off x="8396021" y="2780919"/>
             <a:ext cx="548640" cy="365760"/>
           </a:xfrm>
           <a:prstGeom prst="rect">
@@ -38912,7 +38912,7 @@
         </p:nvSpPr>
         <p:spPr>
           <a:xfrm>
-            <a:off x="8627858" y="2205761"/>
+            <a:off x="8560547" y="2166899"/>
             <a:ext cx="548640" cy="365760"/>
           </a:xfrm>
           <a:prstGeom prst="rect">
@@ -38951,7 +38951,7 @@
         </p:nvSpPr>
         <p:spPr>
           <a:xfrm>
-            <a:off x="9048902" y="1784717"/>
+            <a:off x="9010040" y="1717406"/>
             <a:ext cx="548640" cy="365760"/>
           </a:xfrm>
           <a:prstGeom prst="rect">
@@ -38990,7 +38990,7 @@
         </p:nvSpPr>
         <p:spPr>
           <a:xfrm>
-            <a:off x="9624060" y="1630604"/>
+            <a:off x="9624060" y="1552880"/>
             <a:ext cx="548640" cy="365760"/>
           </a:xfrm>
           <a:prstGeom prst="rect">
@@ -39029,8 +39029,8 @@
         </p:nvSpPr>
         <p:spPr>
           <a:xfrm flipV="1">
-            <a:off x="9898380" y="2623079"/>
-            <a:ext cx="698579" cy="340720"/>
+            <a:off x="9898380" y="2663966"/>
+            <a:ext cx="614749" cy="299833"/>
           </a:xfrm>
           <a:prstGeom prst="line">
             <a:avLst/>
@@ -39052,8 +39052,8 @@
         </p:nvSpPr>
         <p:spPr>
           <a:xfrm flipV="1">
-            <a:off x="9898380" y="2152482"/>
-            <a:ext cx="901059" cy="811317"/>
+            <a:off x="9898380" y="2298103"/>
+            <a:ext cx="739330" cy="665696"/>
           </a:xfrm>
           <a:prstGeom prst="line">
             <a:avLst/>
@@ -40774,7 +40774,7 @@
         </p:nvSpPr>
         <p:spPr>
           <a:xfrm>
-            <a:off x="3431055" y="2335829"/>
+            <a:off x="3463167" y="2280209"/>
             <a:ext cx="548640" cy="365760"/>
           </a:xfrm>
           <a:prstGeom prst="rect">
@@ -40813,7 +40813,7 @@
         </p:nvSpPr>
         <p:spPr>
           <a:xfrm>
-            <a:off x="3778967" y="2683741"/>
+            <a:off x="3834587" y="2651629"/>
             <a:ext cx="548640" cy="365760"/>
           </a:xfrm>
           <a:prstGeom prst="rect">
@@ -40852,7 +40852,7 @@
         </p:nvSpPr>
         <p:spPr>
           <a:xfrm>
-            <a:off x="3906312" y="3158998"/>
+            <a:off x="3970536" y="3158998"/>
             <a:ext cx="548640" cy="365760"/>
           </a:xfrm>
           <a:prstGeom prst="rect">
@@ -40891,7 +40891,7 @@
         </p:nvSpPr>
         <p:spPr>
           <a:xfrm>
-            <a:off x="3778967" y="3634255"/>
+            <a:off x="3834587" y="3666367"/>
             <a:ext cx="548640" cy="365760"/>
           </a:xfrm>
           <a:prstGeom prst="rect">
@@ -40930,7 +40930,7 @@
         </p:nvSpPr>
         <p:spPr>
           <a:xfrm>
-            <a:off x="3431055" y="3982167"/>
+            <a:off x="3463167" y="4037787"/>
             <a:ext cx="548640" cy="365760"/>
           </a:xfrm>
           <a:prstGeom prst="rect">
@@ -40969,7 +40969,7 @@
         </p:nvSpPr>
         <p:spPr>
           <a:xfrm>
-            <a:off x="2955798" y="4109512"/>
+            <a:off x="2955798" y="4173736"/>
             <a:ext cx="548640" cy="365760"/>
           </a:xfrm>
           <a:prstGeom prst="rect">
@@ -41008,7 +41008,7 @@
         </p:nvSpPr>
         <p:spPr>
           <a:xfrm>
-            <a:off x="2480541" y="3982167"/>
+            <a:off x="2448429" y="4037787"/>
             <a:ext cx="548640" cy="365760"/>
           </a:xfrm>
           <a:prstGeom prst="rect">
@@ -41047,7 +41047,7 @@
         </p:nvSpPr>
         <p:spPr>
           <a:xfrm>
-            <a:off x="2132629" y="3634255"/>
+            <a:off x="2077009" y="3666367"/>
             <a:ext cx="548640" cy="365760"/>
           </a:xfrm>
           <a:prstGeom prst="rect">
@@ -41086,7 +41086,7 @@
         </p:nvSpPr>
         <p:spPr>
           <a:xfrm>
-            <a:off x="2005284" y="3158998"/>
+            <a:off x="1941060" y="3158998"/>
             <a:ext cx="548640" cy="365760"/>
           </a:xfrm>
           <a:prstGeom prst="rect">
@@ -41125,7 +41125,7 @@
         </p:nvSpPr>
         <p:spPr>
           <a:xfrm>
-            <a:off x="2132629" y="2683741"/>
+            <a:off x="2077009" y="2651629"/>
             <a:ext cx="548640" cy="365760"/>
           </a:xfrm>
           <a:prstGeom prst="rect">
@@ -41164,7 +41164,7 @@
         </p:nvSpPr>
         <p:spPr>
           <a:xfrm>
-            <a:off x="2480541" y="2335829"/>
+            <a:off x="2448429" y="2280209"/>
             <a:ext cx="548640" cy="365760"/>
           </a:xfrm>
           <a:prstGeom prst="rect">
@@ -41203,7 +41203,7 @@
         </p:nvSpPr>
         <p:spPr>
           <a:xfrm>
-            <a:off x="2955798" y="2208484"/>
+            <a:off x="2955798" y="2144260"/>
             <a:ext cx="548640" cy="365760"/>
           </a:xfrm>
           <a:prstGeom prst="rect">
@@ -41242,8 +41242,8 @@
         </p:nvSpPr>
         <p:spPr>
           <a:xfrm flipH="1">
-            <a:off x="2704027" y="3341878"/>
-            <a:ext cx="526091" cy="368373"/>
+            <a:off x="2767158" y="3341878"/>
+            <a:ext cx="462960" cy="324168"/>
           </a:xfrm>
           <a:prstGeom prst="line">
             <a:avLst/>
@@ -41265,8 +41265,8 @@
         </p:nvSpPr>
         <p:spPr>
           <a:xfrm flipH="1" flipV="1">
-            <a:off x="2362453" y="2840932"/>
-            <a:ext cx="867665" cy="500946"/>
+            <a:off x="2518188" y="2930845"/>
+            <a:ext cx="711930" cy="411033"/>
           </a:xfrm>
           <a:prstGeom prst="line">
             <a:avLst/>
@@ -42804,7 +42804,7 @@
         </p:nvSpPr>
         <p:spPr>
           <a:xfrm>
-            <a:off x="9159771" y="2335829"/>
+            <a:off x="9191883" y="2280209"/>
             <a:ext cx="548640" cy="365760"/>
           </a:xfrm>
           <a:prstGeom prst="rect">
@@ -42843,7 +42843,7 @@
         </p:nvSpPr>
         <p:spPr>
           <a:xfrm>
-            <a:off x="9507683" y="2683741"/>
+            <a:off x="9563303" y="2651629"/>
             <a:ext cx="548640" cy="365760"/>
           </a:xfrm>
           <a:prstGeom prst="rect">
@@ -42882,7 +42882,7 @@
         </p:nvSpPr>
         <p:spPr>
           <a:xfrm>
-            <a:off x="9635028" y="3158998"/>
+            <a:off x="9699252" y="3158998"/>
             <a:ext cx="548640" cy="365760"/>
           </a:xfrm>
           <a:prstGeom prst="rect">
@@ -42921,7 +42921,7 @@
         </p:nvSpPr>
         <p:spPr>
           <a:xfrm>
-            <a:off x="9507683" y="3634255"/>
+            <a:off x="9563303" y="3666367"/>
             <a:ext cx="548640" cy="365760"/>
           </a:xfrm>
           <a:prstGeom prst="rect">
@@ -42960,7 +42960,7 @@
         </p:nvSpPr>
         <p:spPr>
           <a:xfrm>
-            <a:off x="9159771" y="3982167"/>
+            <a:off x="9191883" y="4037787"/>
             <a:ext cx="548640" cy="365760"/>
           </a:xfrm>
           <a:prstGeom prst="rect">
@@ -42999,7 +42999,7 @@
         </p:nvSpPr>
         <p:spPr>
           <a:xfrm>
-            <a:off x="8684514" y="4109512"/>
+            <a:off x="8684514" y="4173736"/>
             <a:ext cx="548640" cy="365760"/>
           </a:xfrm>
           <a:prstGeom prst="rect">
@@ -43038,7 +43038,7 @@
         </p:nvSpPr>
         <p:spPr>
           <a:xfrm>
-            <a:off x="8209257" y="3982167"/>
+            <a:off x="8177145" y="4037787"/>
             <a:ext cx="548640" cy="365760"/>
           </a:xfrm>
           <a:prstGeom prst="rect">
@@ -43077,7 +43077,7 @@
         </p:nvSpPr>
         <p:spPr>
           <a:xfrm>
-            <a:off x="7861345" y="3634255"/>
+            <a:off x="7805725" y="3666367"/>
             <a:ext cx="548640" cy="365760"/>
           </a:xfrm>
           <a:prstGeom prst="rect">
@@ -43116,7 +43116,7 @@
         </p:nvSpPr>
         <p:spPr>
           <a:xfrm>
-            <a:off x="7734000" y="3158998"/>
+            <a:off x="7669776" y="3158998"/>
             <a:ext cx="548640" cy="365760"/>
           </a:xfrm>
           <a:prstGeom prst="rect">
@@ -43155,7 +43155,7 @@
         </p:nvSpPr>
         <p:spPr>
           <a:xfrm>
-            <a:off x="7861345" y="2683741"/>
+            <a:off x="7805725" y="2651629"/>
             <a:ext cx="548640" cy="365760"/>
           </a:xfrm>
           <a:prstGeom prst="rect">
@@ -43194,7 +43194,7 @@
         </p:nvSpPr>
         <p:spPr>
           <a:xfrm>
-            <a:off x="8209257" y="2335829"/>
+            <a:off x="8177145" y="2280209"/>
             <a:ext cx="548640" cy="365760"/>
           </a:xfrm>
           <a:prstGeom prst="rect">
@@ -43233,7 +43233,7 @@
         </p:nvSpPr>
         <p:spPr>
           <a:xfrm>
-            <a:off x="8684514" y="2208484"/>
+            <a:off x="8684514" y="2144260"/>
             <a:ext cx="548640" cy="365760"/>
           </a:xfrm>
           <a:prstGeom prst="rect">
@@ -43272,8 +43272,8 @@
         </p:nvSpPr>
         <p:spPr>
           <a:xfrm flipH="1">
-            <a:off x="8432743" y="3341878"/>
-            <a:ext cx="526091" cy="368373"/>
+            <a:off x="8495874" y="3341878"/>
+            <a:ext cx="462960" cy="324168"/>
           </a:xfrm>
           <a:prstGeom prst="line">
             <a:avLst/>
@@ -43295,8 +43295,8 @@
         </p:nvSpPr>
         <p:spPr>
           <a:xfrm flipH="1" flipV="1">
-            <a:off x="8091169" y="2840932"/>
-            <a:ext cx="867665" cy="500946"/>
+            <a:off x="8246904" y="2930845"/>
+            <a:ext cx="711930" cy="411033"/>
           </a:xfrm>
           <a:prstGeom prst="line">
             <a:avLst/>
@@ -45029,7 +45029,7 @@
         </p:nvSpPr>
         <p:spPr>
           <a:xfrm>
-            <a:off x="3365844" y="2215718"/>
+            <a:off x="3392778" y="2169067"/>
             <a:ext cx="548640" cy="365760"/>
           </a:xfrm>
           <a:prstGeom prst="rect">
@@ -45068,7 +45068,7 @@
         </p:nvSpPr>
         <p:spPr>
           <a:xfrm>
-            <a:off x="3657651" y="2507525"/>
+            <a:off x="3704302" y="2480591"/>
             <a:ext cx="548640" cy="365760"/>
           </a:xfrm>
           <a:prstGeom prst="rect">
@@ -45107,7 +45107,7 @@
         </p:nvSpPr>
         <p:spPr>
           <a:xfrm>
-            <a:off x="3764460" y="2906141"/>
+            <a:off x="3818327" y="2906141"/>
             <a:ext cx="548640" cy="365760"/>
           </a:xfrm>
           <a:prstGeom prst="rect">
@@ -45146,7 +45146,7 @@
         </p:nvSpPr>
         <p:spPr>
           <a:xfrm>
-            <a:off x="3657651" y="3304757"/>
+            <a:off x="3704302" y="3331691"/>
             <a:ext cx="548640" cy="365760"/>
           </a:xfrm>
           <a:prstGeom prst="rect">
@@ -45185,7 +45185,7 @@
         </p:nvSpPr>
         <p:spPr>
           <a:xfrm>
-            <a:off x="3365844" y="3596564"/>
+            <a:off x="3392778" y="3643215"/>
             <a:ext cx="548640" cy="365760"/>
           </a:xfrm>
           <a:prstGeom prst="rect">
@@ -45224,7 +45224,7 @@
         </p:nvSpPr>
         <p:spPr>
           <a:xfrm>
-            <a:off x="2967228" y="3703373"/>
+            <a:off x="2967228" y="3757240"/>
             <a:ext cx="548640" cy="365760"/>
           </a:xfrm>
           <a:prstGeom prst="rect">
@@ -45263,7 +45263,7 @@
         </p:nvSpPr>
         <p:spPr>
           <a:xfrm>
-            <a:off x="2568612" y="3596564"/>
+            <a:off x="2541678" y="3643215"/>
             <a:ext cx="548640" cy="365760"/>
           </a:xfrm>
           <a:prstGeom prst="rect">
@@ -45302,7 +45302,7 @@
         </p:nvSpPr>
         <p:spPr>
           <a:xfrm>
-            <a:off x="2276805" y="3304757"/>
+            <a:off x="2230154" y="3331691"/>
             <a:ext cx="548640" cy="365760"/>
           </a:xfrm>
           <a:prstGeom prst="rect">
@@ -45341,7 +45341,7 @@
         </p:nvSpPr>
         <p:spPr>
           <a:xfrm>
-            <a:off x="2169996" y="2906141"/>
+            <a:off x="2116129" y="2906141"/>
             <a:ext cx="548640" cy="365760"/>
           </a:xfrm>
           <a:prstGeom prst="rect">
@@ -45380,7 +45380,7 @@
         </p:nvSpPr>
         <p:spPr>
           <a:xfrm>
-            <a:off x="2276805" y="2507525"/>
+            <a:off x="2230154" y="2480591"/>
             <a:ext cx="548640" cy="365760"/>
           </a:xfrm>
           <a:prstGeom prst="rect">
@@ -45419,7 +45419,7 @@
         </p:nvSpPr>
         <p:spPr>
           <a:xfrm>
-            <a:off x="2568612" y="2215718"/>
+            <a:off x="2541678" y="2169067"/>
             <a:ext cx="548640" cy="365760"/>
           </a:xfrm>
           <a:prstGeom prst="rect">
@@ -45458,7 +45458,7 @@
         </p:nvSpPr>
         <p:spPr>
           <a:xfrm>
-            <a:off x="2967228" y="2108909"/>
+            <a:off x="2967228" y="2055042"/>
             <a:ext cx="548640" cy="365760"/>
           </a:xfrm>
           <a:prstGeom prst="rect">
@@ -45497,8 +45497,8 @@
         </p:nvSpPr>
         <p:spPr>
           <a:xfrm flipV="1">
-            <a:off x="3241548" y="2622519"/>
-            <a:ext cx="269335" cy="466502"/>
+            <a:off x="3241548" y="2678499"/>
+            <a:ext cx="237015" cy="410522"/>
           </a:xfrm>
           <a:prstGeom prst="line">
             <a:avLst/>
@@ -45520,8 +45520,8 @@
         </p:nvSpPr>
         <p:spPr>
           <a:xfrm flipV="1">
-            <a:off x="3241548" y="2248695"/>
-            <a:ext cx="0" cy="840326"/>
+            <a:off x="3241548" y="2399523"/>
+            <a:ext cx="0" cy="689498"/>
           </a:xfrm>
           <a:prstGeom prst="line">
             <a:avLst/>
@@ -47012,7 +47012,7 @@
         </p:nvSpPr>
         <p:spPr>
           <a:xfrm>
-            <a:off x="9071700" y="2215718"/>
+            <a:off x="9098634" y="2169067"/>
             <a:ext cx="548640" cy="365760"/>
           </a:xfrm>
           <a:prstGeom prst="rect">
@@ -47051,7 +47051,7 @@
         </p:nvSpPr>
         <p:spPr>
           <a:xfrm>
-            <a:off x="9363507" y="2507525"/>
+            <a:off x="9410158" y="2480591"/>
             <a:ext cx="548640" cy="365760"/>
           </a:xfrm>
           <a:prstGeom prst="rect">
@@ -47090,7 +47090,7 @@
         </p:nvSpPr>
         <p:spPr>
           <a:xfrm>
-            <a:off x="9470316" y="2906141"/>
+            <a:off x="9524183" y="2906141"/>
             <a:ext cx="548640" cy="365760"/>
           </a:xfrm>
           <a:prstGeom prst="rect">
@@ -47129,7 +47129,7 @@
         </p:nvSpPr>
         <p:spPr>
           <a:xfrm>
-            <a:off x="9363507" y="3304757"/>
+            <a:off x="9410158" y="3331691"/>
             <a:ext cx="548640" cy="365760"/>
           </a:xfrm>
           <a:prstGeom prst="rect">
@@ -47168,7 +47168,7 @@
         </p:nvSpPr>
         <p:spPr>
           <a:xfrm>
-            <a:off x="9071700" y="3596564"/>
+            <a:off x="9098634" y="3643215"/>
             <a:ext cx="548640" cy="365760"/>
           </a:xfrm>
           <a:prstGeom prst="rect">
@@ -47207,7 +47207,7 @@
         </p:nvSpPr>
         <p:spPr>
           <a:xfrm>
-            <a:off x="8673084" y="3703373"/>
+            <a:off x="8673084" y="3757240"/>
             <a:ext cx="548640" cy="365760"/>
           </a:xfrm>
           <a:prstGeom prst="rect">
@@ -47246,7 +47246,7 @@
         </p:nvSpPr>
         <p:spPr>
           <a:xfrm>
-            <a:off x="8274468" y="3596564"/>
+            <a:off x="8247534" y="3643215"/>
             <a:ext cx="548640" cy="365760"/>
           </a:xfrm>
           <a:prstGeom prst="rect">
@@ -47285,7 +47285,7 @@
         </p:nvSpPr>
         <p:spPr>
           <a:xfrm>
-            <a:off x="7982661" y="3304757"/>
+            <a:off x="7936010" y="3331691"/>
             <a:ext cx="548640" cy="365760"/>
           </a:xfrm>
           <a:prstGeom prst="rect">
@@ -47324,7 +47324,7 @@
         </p:nvSpPr>
         <p:spPr>
           <a:xfrm>
-            <a:off x="7875852" y="2906141"/>
+            <a:off x="7821985" y="2906141"/>
             <a:ext cx="548640" cy="365760"/>
           </a:xfrm>
           <a:prstGeom prst="rect">
@@ -47363,7 +47363,7 @@
         </p:nvSpPr>
         <p:spPr>
           <a:xfrm>
-            <a:off x="7982661" y="2507525"/>
+            <a:off x="7936010" y="2480591"/>
             <a:ext cx="548640" cy="365760"/>
           </a:xfrm>
           <a:prstGeom prst="rect">
@@ -47402,7 +47402,7 @@
         </p:nvSpPr>
         <p:spPr>
           <a:xfrm>
-            <a:off x="8274468" y="2215718"/>
+            <a:off x="8247534" y="2169067"/>
             <a:ext cx="548640" cy="365760"/>
           </a:xfrm>
           <a:prstGeom prst="rect">
@@ -47441,7 +47441,7 @@
         </p:nvSpPr>
         <p:spPr>
           <a:xfrm>
-            <a:off x="8673084" y="2108909"/>
+            <a:off x="8673084" y="2055042"/>
             <a:ext cx="548640" cy="365760"/>
           </a:xfrm>
           <a:prstGeom prst="rect">
@@ -47480,8 +47480,8 @@
         </p:nvSpPr>
         <p:spPr>
           <a:xfrm flipV="1">
-            <a:off x="8947404" y="2819686"/>
-            <a:ext cx="466502" cy="269335"/>
+            <a:off x="8947404" y="2852006"/>
+            <a:ext cx="410522" cy="237015"/>
           </a:xfrm>
           <a:prstGeom prst="line">
             <a:avLst/>
@@ -47503,8 +47503,8 @@
         </p:nvSpPr>
         <p:spPr>
           <a:xfrm flipV="1">
-            <a:off x="8947404" y="2248695"/>
-            <a:ext cx="0" cy="840326"/>
+            <a:off x="8947404" y="2399523"/>
+            <a:ext cx="0" cy="689498"/>
           </a:xfrm>
           <a:prstGeom prst="line">
             <a:avLst/>

--- a/dist/초2/수학/도형과측정/초2_수학_도형과측정_05_시각과시간_학생용.pptx
+++ b/dist/초2/수학/도형과측정/초2_수학_도형과측정_05_시각과시간_학생용.pptx
@@ -121,13 +121,13 @@
   <p:extLst>
     <p:ext uri="{521415D9-36F7-43E2-AB2F-B90AF26B5E84}">
       <p14:sectionLst xmlns:p14="http://schemas.microsoft.com/office/powerpoint/2010/main">
-        <p14:section name="도입" id="{fe21be56-9574-f614-9c2f-912a0dda891a}">
+        <p14:section name="도입" id="{bb33f762-a6c0-4a65-3844-55d02db6f607}">
           <p14:sldIdLst>
             <p14:sldId id="256"/>
             <p14:sldId id="257"/>
           </p14:sldIdLst>
         </p14:section>
-        <p14:section name="개념" id="{1e9c5a34-aace-4cf2-3901-1936e9027344}">
+        <p14:section name="개념" id="{770c32a5-a9b6-ef4f-ff06-663de73ff859}">
           <p14:sldIdLst>
             <p14:sldId id="258"/>
             <p14:sldId id="259"/>
@@ -137,31 +137,31 @@
             <p14:sldId id="265"/>
           </p14:sldIdLst>
         </p14:section>
-        <p14:section name="연습" id="{d0db4b53-c033-a08c-a1be-323b19a65797}">
+        <p14:section name="연습" id="{dca2313f-2147-3105-0b62-322f6d571e61}">
           <p14:sldIdLst>
             <p14:sldId id="261"/>
             <p14:sldId id="262"/>
             <p14:sldId id="266"/>
           </p14:sldIdLst>
         </p14:section>
-        <p14:section name="개념" id="{36fb3e3c-4e12-b8eb-9d74-0034c2fe25b4}">
+        <p14:section name="개념" id="{8f9e6ff6-a514-9d77-3850-23ede1a6e568}">
           <p14:sldIdLst/>
         </p14:section>
-        <p14:section name="연습" id="{3dbbf358-fb3a-8a5f-a6e1-033a30091e9f}">
+        <p14:section name="연습" id="{29a984c9-3f8c-17e0-c66e-eb1880ccaed1}">
           <p14:sldIdLst/>
         </p14:section>
-        <p14:section name="확인" id="{1901ede0-1f30-251c-3785-42f3c50eb4c0}">
+        <p14:section name="확인" id="{3131f70d-405e-b63c-3305-4d4bf3a65287}">
           <p14:sldIdLst>
             <p14:sldId id="267"/>
             <p14:sldId id="268"/>
           </p14:sldIdLst>
         </p14:section>
-        <p14:section name="정리" id="{a6c402a3-5bec-52cb-002d-3bac433c3b30}">
+        <p14:section name="정리" id="{981660a1-24f1-9491-a099-424e29d2064c}">
           <p14:sldIdLst>
             <p14:sldId id="269"/>
           </p14:sldIdLst>
         </p14:section>
-        <p14:section name="보충" id="{a83fd308-987c-0837-95c9-b53f6c49fd4a}">
+        <p14:section name="보충" id="{b1fa00fa-1b3d-ca03-f871-741e60356289}">
           <p14:sldIdLst>
             <p14:sldId id="270"/>
           </p14:sldIdLst>

--- a/dist/초2/수학/도형과측정/초2_수학_도형과측정_05_시각과시간_학생용.pptx
+++ b/dist/초2/수학/도형과측정/초2_수학_도형과측정_05_시각과시간_학생용.pptx
@@ -121,13 +121,13 @@
   <p:extLst>
     <p:ext uri="{521415D9-36F7-43E2-AB2F-B90AF26B5E84}">
       <p14:sectionLst xmlns:p14="http://schemas.microsoft.com/office/powerpoint/2010/main">
-        <p14:section name="도입" id="{bb33f762-a6c0-4a65-3844-55d02db6f607}">
+        <p14:section name="도입" id="{9aa54b12-4209-01d8-e84e-bfd2f499a1c8}">
           <p14:sldIdLst>
             <p14:sldId id="256"/>
             <p14:sldId id="257"/>
           </p14:sldIdLst>
         </p14:section>
-        <p14:section name="개념" id="{770c32a5-a9b6-ef4f-ff06-663de73ff859}">
+        <p14:section name="개념" id="{b8e20e52-8fda-8c42-f26e-9cabab5fd343}">
           <p14:sldIdLst>
             <p14:sldId id="258"/>
             <p14:sldId id="259"/>
@@ -137,31 +137,31 @@
             <p14:sldId id="265"/>
           </p14:sldIdLst>
         </p14:section>
-        <p14:section name="연습" id="{dca2313f-2147-3105-0b62-322f6d571e61}">
+        <p14:section name="연습" id="{b11e5b4f-3a30-4f93-ae60-e93d7490ac72}">
           <p14:sldIdLst>
             <p14:sldId id="261"/>
             <p14:sldId id="262"/>
             <p14:sldId id="266"/>
           </p14:sldIdLst>
         </p14:section>
-        <p14:section name="개념" id="{8f9e6ff6-a514-9d77-3850-23ede1a6e568}">
+        <p14:section name="개념" id="{f12ee235-ca95-c593-1865-8bd2d944e048}">
           <p14:sldIdLst/>
         </p14:section>
-        <p14:section name="연습" id="{29a984c9-3f8c-17e0-c66e-eb1880ccaed1}">
+        <p14:section name="연습" id="{6a2cd420-6970-769f-8c00-b4bb266c7f14}">
           <p14:sldIdLst/>
         </p14:section>
-        <p14:section name="확인" id="{3131f70d-405e-b63c-3305-4d4bf3a65287}">
+        <p14:section name="확인" id="{ed950773-63e5-fbe4-4bc6-c34ad5f48044}">
           <p14:sldIdLst>
             <p14:sldId id="267"/>
             <p14:sldId id="268"/>
           </p14:sldIdLst>
         </p14:section>
-        <p14:section name="정리" id="{981660a1-24f1-9491-a099-424e29d2064c}">
+        <p14:section name="정리" id="{5447df70-1794-dc58-3a9e-0c1f65c11a50}">
           <p14:sldIdLst>
             <p14:sldId id="269"/>
           </p14:sldIdLst>
         </p14:section>
-        <p14:section name="보충" id="{b1fa00fa-1b3d-ca03-f871-741e60356289}">
+        <p14:section name="보충" id="{5d760d5d-8be1-066f-a132-18a47718654f}">
           <p14:sldIdLst>
             <p14:sldId id="270"/>
           </p14:sldIdLst>
@@ -17579,7 +17579,7 @@
                 <a:ea typeface="맑은 고딕" pitchFamily="34" charset="-122"/>
                 <a:cs typeface="맑은 고딕" pitchFamily="34" charset="-120"/>
               </a:rPr>
-              <a:t>다음 시간: 분류하기</a:t>
+              <a:t>다음 시간: 달력 보기</a:t>
             </a:r>
             <a:endParaRPr lang="ko-KR" sz="2600" dirty="0"/>
           </a:p>
